--- a/docs/實驗驗證計畫_簡報.pptx
+++ b/docs/實驗驗證計畫_簡報.pptx
@@ -3237,8 +3237,8 @@
                 <a:solidFill>
                   <a:srgbClr val="E9C466"/>
                 </a:solidFill>
-                <a:latin typeface="WenQuanYi Zen Hei"/>
-                <a:ea typeface="WenQuanYi Zen Hei"/>
+                <a:latin typeface="PingFang TC"/>
+                <a:ea typeface="PingFang TC"/>
               </a:rPr>
               <a:t>EXPERIMENTAL VALIDATION CAMPAIGN</a:t>
             </a:r>
@@ -3280,8 +3280,8 @@
                 <a:solidFill>
                   <a:srgbClr val="FFFFFF"/>
                 </a:solidFill>
-                <a:latin typeface="WenQuanYi Zen Hei"/>
-                <a:ea typeface="WenQuanYi Zen Hei"/>
+                <a:latin typeface="PingFang TC"/>
+                <a:ea typeface="PingFang TC"/>
               </a:rPr>
               <a:t>熱磁材料實驗驗證計畫</a:t>
             </a:r>
@@ -3300,8 +3300,8 @@
                 <a:solidFill>
                   <a:srgbClr val="F2F4F7"/>
                 </a:solidFill>
-                <a:latin typeface="WenQuanYi Zen Hei"/>
-                <a:ea typeface="WenQuanYi Zen Hei"/>
+                <a:latin typeface="PingFang TC"/>
+                <a:ea typeface="PingFang TC"/>
               </a:rPr>
               <a:t>小規模先導 → 階段閘控 → 規模化擴張</a:t>
             </a:r>
@@ -3343,8 +3343,8 @@
                 <a:solidFill>
                   <a:srgbClr val="F2F4F7"/>
                 </a:solidFill>
-                <a:latin typeface="WenQuanYi Zen Hei"/>
-                <a:ea typeface="WenQuanYi Zen Hei"/>
+                <a:latin typeface="PingFang TC"/>
+                <a:ea typeface="PingFang TC"/>
               </a:rPr>
               <a:t>把模型的『相對可信』收斂成『絕對可信』；先以最小可行先導去風險，避免重蹈覆轍</a:t>
             </a:r>
@@ -3386,8 +3386,8 @@
                 <a:solidFill>
                   <a:srgbClr val="E9C466"/>
                 </a:solidFill>
-                <a:latin typeface="WenQuanYi Zen Hei"/>
-                <a:ea typeface="WenQuanYi Zen Hei"/>
+                <a:latin typeface="PingFang TC"/>
+                <a:ea typeface="PingFang TC"/>
               </a:rPr>
               <a:t>alloy_engine · 實驗計畫 + 詳細需求 · 2026</a:t>
             </a:r>
@@ -3491,8 +3491,8 @@
                 <a:solidFill>
                   <a:srgbClr val="2A9D8F"/>
                 </a:solidFill>
-                <a:latin typeface="WenQuanYi Zen Hei"/>
-                <a:ea typeface="WenQuanYi Zen Hei"/>
+                <a:latin typeface="PingFang TC"/>
+                <a:ea typeface="PingFang TC"/>
               </a:rPr>
               <a:t>PHASE 0</a:t>
             </a:r>
@@ -3534,8 +3534,8 @@
                 <a:solidFill>
                   <a:srgbClr val="1F3A5F"/>
                 </a:solidFill>
-                <a:latin typeface="WenQuanYi Zen Hei"/>
-                <a:ea typeface="WenQuanYi Zen Hei"/>
+                <a:latin typeface="PingFang TC"/>
+                <a:ea typeface="PingFang TC"/>
               </a:rPr>
               <a:t>先導實驗：純 Gd（最小可行）</a:t>
             </a:r>
@@ -3621,8 +3621,8 @@
                 <a:solidFill>
                   <a:srgbClr val="5A6370"/>
                 </a:solidFill>
-                <a:latin typeface="WenQuanYi Zen Hei"/>
-                <a:ea typeface="WenQuanYi Zen Hei"/>
+                <a:latin typeface="PingFang TC"/>
+                <a:ea typeface="PingFang TC"/>
               </a:rPr>
               <a:t>10</a:t>
             </a:r>
@@ -3664,8 +3664,8 @@
                 <a:solidFill>
                   <a:srgbClr val="262B33"/>
                 </a:solidFill>
-                <a:latin typeface="WenQuanYi Zen Hei"/>
-                <a:ea typeface="WenQuanYi Zen Hei"/>
+                <a:latin typeface="PingFang TC"/>
+                <a:ea typeface="PingFang TC"/>
               </a:rPr>
               <a:t>●  為何選 Gd：商購可得、二階、文獻 M-H/ΔS_M 完整。</a:t>
             </a:r>
@@ -3684,8 +3684,8 @@
                 <a:solidFill>
                   <a:srgbClr val="262B33"/>
                 </a:solidFill>
-                <a:latin typeface="WenQuanYi Zen Hei"/>
-                <a:ea typeface="WenQuanYi Zen Hei"/>
+                <a:latin typeface="PingFang TC"/>
+                <a:ea typeface="PingFang TC"/>
               </a:rPr>
               <a:t>●  範圍：1 個樣品、2 項核心量測（VSM + DSC）。</a:t>
             </a:r>
@@ -3704,8 +3704,8 @@
                 <a:solidFill>
                   <a:srgbClr val="262B33"/>
                 </a:solidFill>
-                <a:latin typeface="WenQuanYi Zen Hei"/>
-                <a:ea typeface="WenQuanYi Zen Hei"/>
+                <a:latin typeface="PingFang TC"/>
+                <a:ea typeface="PingFang TC"/>
               </a:rPr>
               <a:t>●  目的：打通『製樣→量測→回填→比對文獻』整條鏈。</a:t>
             </a:r>
@@ -3724,8 +3724,8 @@
                 <a:solidFill>
                   <a:srgbClr val="262B33"/>
                 </a:solidFill>
-                <a:latin typeface="WenQuanYi Zen Hei"/>
-                <a:ea typeface="WenQuanYi Zen Hei"/>
+                <a:latin typeface="PingFang TC"/>
+                <a:ea typeface="PingFang TC"/>
               </a:rPr>
               <a:t>●  成本/時間：最低（~2 個月、1 樣）。</a:t>
             </a:r>
@@ -3744,8 +3744,8 @@
                 <a:solidFill>
                   <a:srgbClr val="2A9D8F"/>
                 </a:solidFill>
-                <a:latin typeface="WenQuanYi Zen Hei"/>
-                <a:ea typeface="WenQuanYi Zen Hei"/>
+                <a:latin typeface="PingFang TC"/>
+                <a:ea typeface="PingFang TC"/>
               </a:rPr>
               <a:t>●  產出：驗證我們的量測與回填流程本身可信。</a:t>
             </a:r>
@@ -3831,8 +3831,8 @@
                 <a:solidFill>
                   <a:srgbClr val="1F3A5F"/>
                 </a:solidFill>
-                <a:latin typeface="WenQuanYi Zen Hei"/>
-                <a:ea typeface="WenQuanYi Zen Hei"/>
+                <a:latin typeface="PingFang TC"/>
+                <a:ea typeface="PingFang TC"/>
               </a:rPr>
               <a:t>Phase 0 為什麼關鍵</a:t>
             </a:r>
@@ -3851,8 +3851,8 @@
                 <a:solidFill>
                   <a:srgbClr val="262B33"/>
                 </a:solidFill>
-                <a:latin typeface="WenQuanYi Zen Hei"/>
-                <a:ea typeface="WenQuanYi Zen Hei"/>
+                <a:latin typeface="PingFang TC"/>
+                <a:ea typeface="PingFang TC"/>
               </a:rPr>
               <a:t>先用『答案已知』的 Gd 校準儀器與流程，</a:t>
             </a:r>
@@ -3871,8 +3871,8 @@
                 <a:solidFill>
                   <a:srgbClr val="262B33"/>
                 </a:solidFill>
-                <a:latin typeface="WenQuanYi Zen Hei"/>
-                <a:ea typeface="WenQuanYi Zen Hei"/>
+                <a:latin typeface="PingFang TC"/>
+                <a:ea typeface="PingFang TC"/>
               </a:rPr>
               <a:t>確認我們量得準、回填對。</a:t>
             </a:r>
@@ -3891,8 +3891,8 @@
                 <a:solidFill>
                   <a:srgbClr val="E76F51"/>
                 </a:solidFill>
-                <a:latin typeface="WenQuanYi Zen Hei"/>
-                <a:ea typeface="WenQuanYi Zen Hei"/>
+                <a:latin typeface="PingFang TC"/>
+                <a:ea typeface="PingFang TC"/>
               </a:rPr>
               <a:t>若連 Gd 都對不上 → 先修流程，</a:t>
             </a:r>
@@ -3911,8 +3911,8 @@
                 <a:solidFill>
                   <a:srgbClr val="E76F51"/>
                 </a:solidFill>
-                <a:latin typeface="WenQuanYi Zen Hei"/>
-                <a:ea typeface="WenQuanYi Zen Hei"/>
+                <a:latin typeface="PingFang TC"/>
+                <a:ea typeface="PingFang TC"/>
               </a:rPr>
               <a:t>不浪費昂貴的一階樣品。</a:t>
             </a:r>
@@ -4016,8 +4016,8 @@
                 <a:solidFill>
                   <a:srgbClr val="2A9D8F"/>
                 </a:solidFill>
-                <a:latin typeface="WenQuanYi Zen Hei"/>
-                <a:ea typeface="WenQuanYi Zen Hei"/>
+                <a:latin typeface="PingFang TC"/>
+                <a:ea typeface="PingFang TC"/>
               </a:rPr>
               <a:t>PHASE 0 STEPS</a:t>
             </a:r>
@@ -4059,8 +4059,8 @@
                 <a:solidFill>
                   <a:srgbClr val="1F3A5F"/>
                 </a:solidFill>
-                <a:latin typeface="WenQuanYi Zen Hei"/>
-                <a:ea typeface="WenQuanYi Zen Hei"/>
+                <a:latin typeface="PingFang TC"/>
+                <a:ea typeface="PingFang TC"/>
               </a:rPr>
               <a:t>先導步驟與量測</a:t>
             </a:r>
@@ -4146,8 +4146,8 @@
                 <a:solidFill>
                   <a:srgbClr val="5A6370"/>
                 </a:solidFill>
-                <a:latin typeface="WenQuanYi Zen Hei"/>
-                <a:ea typeface="WenQuanYi Zen Hei"/>
+                <a:latin typeface="PingFang TC"/>
+                <a:ea typeface="PingFang TC"/>
               </a:rPr>
               <a:t>11</a:t>
             </a:r>
@@ -4233,8 +4233,8 @@
                 <a:solidFill>
                   <a:srgbClr val="FFFFFF"/>
                 </a:solidFill>
-                <a:latin typeface="WenQuanYi Zen Hei"/>
-                <a:ea typeface="WenQuanYi Zen Hei"/>
+                <a:latin typeface="PingFang TC"/>
+                <a:ea typeface="PingFang TC"/>
               </a:rPr>
               <a:t>步</a:t>
             </a:r>
@@ -4320,8 +4320,8 @@
                 <a:solidFill>
                   <a:srgbClr val="FFFFFF"/>
                 </a:solidFill>
-                <a:latin typeface="WenQuanYi Zen Hei"/>
-                <a:ea typeface="WenQuanYi Zen Hei"/>
+                <a:latin typeface="PingFang TC"/>
+                <a:ea typeface="PingFang TC"/>
               </a:rPr>
               <a:t>活動</a:t>
             </a:r>
@@ -4407,8 +4407,8 @@
                 <a:solidFill>
                   <a:srgbClr val="FFFFFF"/>
                 </a:solidFill>
-                <a:latin typeface="WenQuanYi Zen Hei"/>
-                <a:ea typeface="WenQuanYi Zen Hei"/>
+                <a:latin typeface="PingFang TC"/>
+                <a:ea typeface="PingFang TC"/>
               </a:rPr>
               <a:t>量測/輸出</a:t>
             </a:r>
@@ -4494,8 +4494,8 @@
                 <a:solidFill>
                   <a:srgbClr val="FFFFFF"/>
                 </a:solidFill>
-                <a:latin typeface="WenQuanYi Zen Hei"/>
-                <a:ea typeface="WenQuanYi Zen Hei"/>
+                <a:latin typeface="PingFang TC"/>
+                <a:ea typeface="PingFang TC"/>
               </a:rPr>
               <a:t>對應模型</a:t>
             </a:r>
@@ -4581,8 +4581,8 @@
                 <a:solidFill>
                   <a:srgbClr val="262B33"/>
                 </a:solidFill>
-                <a:latin typeface="WenQuanYi Zen Hei"/>
-                <a:ea typeface="WenQuanYi Zen Hei"/>
+                <a:latin typeface="PingFang TC"/>
+                <a:ea typeface="PingFang TC"/>
               </a:rPr>
               <a:t>1</a:t>
             </a:r>
@@ -4668,8 +4668,8 @@
                 <a:solidFill>
                   <a:srgbClr val="262B33"/>
                 </a:solidFill>
-                <a:latin typeface="WenQuanYi Zen Hei"/>
-                <a:ea typeface="WenQuanYi Zen Hei"/>
+                <a:latin typeface="PingFang TC"/>
+                <a:ea typeface="PingFang TC"/>
               </a:rPr>
               <a:t>採購高純 Gd + 切樣</a:t>
             </a:r>
@@ -4755,8 +4755,8 @@
                 <a:solidFill>
                   <a:srgbClr val="262B33"/>
                 </a:solidFill>
-                <a:latin typeface="WenQuanYi Zen Hei"/>
-                <a:ea typeface="WenQuanYi Zen Hei"/>
+                <a:latin typeface="PingFang TC"/>
+                <a:ea typeface="PingFang TC"/>
               </a:rPr>
               <a:t>EDS/XRD 確認純度相</a:t>
             </a:r>
@@ -4842,8 +4842,8 @@
                 <a:solidFill>
                   <a:srgbClr val="262B33"/>
                 </a:solidFill>
-                <a:latin typeface="WenQuanYi Zen Hei"/>
-                <a:ea typeface="WenQuanYi Zen Hei"/>
+                <a:latin typeface="PingFang TC"/>
+                <a:ea typeface="PingFang TC"/>
               </a:rPr>
               <a:t>—</a:t>
             </a:r>
@@ -4929,8 +4929,8 @@
                 <a:solidFill>
                   <a:srgbClr val="262B33"/>
                 </a:solidFill>
-                <a:latin typeface="WenQuanYi Zen Hei"/>
-                <a:ea typeface="WenQuanYi Zen Hei"/>
+                <a:latin typeface="PingFang TC"/>
+                <a:ea typeface="PingFang TC"/>
               </a:rPr>
               <a:t>2</a:t>
             </a:r>
@@ -5016,8 +5016,8 @@
                 <a:solidFill>
                   <a:srgbClr val="262B33"/>
                 </a:solidFill>
-                <a:latin typeface="WenQuanYi Zen Hei"/>
-                <a:ea typeface="WenQuanYi Zen Hei"/>
+                <a:latin typeface="PingFang TC"/>
+                <a:ea typeface="PingFang TC"/>
               </a:rPr>
               <a:t>VSM M-H @ 多溫度</a:t>
             </a:r>
@@ -5103,8 +5103,8 @@
                 <a:solidFill>
                   <a:srgbClr val="262B33"/>
                 </a:solidFill>
-                <a:latin typeface="WenQuanYi Zen Hei"/>
-                <a:ea typeface="WenQuanYi Zen Hei"/>
+                <a:latin typeface="PingFang TC"/>
+                <a:ea typeface="PingFang TC"/>
               </a:rPr>
               <a:t>ΔJ(T)、磁滯面積</a:t>
             </a:r>
@@ -5190,8 +5190,8 @@
                 <a:solidFill>
                   <a:srgbClr val="262B33"/>
                 </a:solidFill>
-                <a:latin typeface="WenQuanYi Zen Hei"/>
-                <a:ea typeface="WenQuanYi Zen Hei"/>
+                <a:latin typeface="PingFang TC"/>
+                <a:ea typeface="PingFang TC"/>
               </a:rPr>
               <a:t>ΔM / 磁滯損耗</a:t>
             </a:r>
@@ -5277,8 +5277,8 @@
                 <a:solidFill>
                   <a:srgbClr val="262B33"/>
                 </a:solidFill>
-                <a:latin typeface="WenQuanYi Zen Hei"/>
-                <a:ea typeface="WenQuanYi Zen Hei"/>
+                <a:latin typeface="PingFang TC"/>
+                <a:ea typeface="PingFang TC"/>
               </a:rPr>
               <a:t>3</a:t>
             </a:r>
@@ -5364,8 +5364,8 @@
                 <a:solidFill>
                   <a:srgbClr val="262B33"/>
                 </a:solidFill>
-                <a:latin typeface="WenQuanYi Zen Hei"/>
-                <a:ea typeface="WenQuanYi Zen Hei"/>
+                <a:latin typeface="PingFang TC"/>
+                <a:ea typeface="PingFang TC"/>
               </a:rPr>
               <a:t>DSC 過 Tc</a:t>
             </a:r>
@@ -5451,8 +5451,8 @@
                 <a:solidFill>
                   <a:srgbClr val="262B33"/>
                 </a:solidFill>
-                <a:latin typeface="WenQuanYi Zen Hei"/>
-                <a:ea typeface="WenQuanYi Zen Hei"/>
+                <a:latin typeface="PingFang TC"/>
+                <a:ea typeface="PingFang TC"/>
               </a:rPr>
               <a:t>ΔS_M、Cp、Tc</a:t>
             </a:r>
@@ -5538,8 +5538,8 @@
                 <a:solidFill>
                   <a:srgbClr val="262B33"/>
                 </a:solidFill>
-                <a:latin typeface="WenQuanYi Zen Hei"/>
-                <a:ea typeface="WenQuanYi Zen Hei"/>
+                <a:latin typeface="PingFang TC"/>
+                <a:ea typeface="PingFang TC"/>
               </a:rPr>
               <a:t>reference_materials</a:t>
             </a:r>
@@ -5625,8 +5625,8 @@
                 <a:solidFill>
                   <a:srgbClr val="262B33"/>
                 </a:solidFill>
-                <a:latin typeface="WenQuanYi Zen Hei"/>
-                <a:ea typeface="WenQuanYi Zen Hei"/>
+                <a:latin typeface="PingFang TC"/>
+                <a:ea typeface="PingFang TC"/>
               </a:rPr>
               <a:t>4</a:t>
             </a:r>
@@ -5712,8 +5712,8 @@
                 <a:solidFill>
                   <a:srgbClr val="262B33"/>
                 </a:solidFill>
-                <a:latin typeface="WenQuanYi Zen Hei"/>
-                <a:ea typeface="WenQuanYi Zen Hei"/>
+                <a:latin typeface="PingFang TC"/>
+                <a:ea typeface="PingFang TC"/>
               </a:rPr>
               <a:t>M(T) 擬合</a:t>
             </a:r>
@@ -5799,8 +5799,8 @@
                 <a:solidFill>
                   <a:srgbClr val="262B33"/>
                 </a:solidFill>
-                <a:latin typeface="WenQuanYi Zen Hei"/>
-                <a:ea typeface="WenQuanYi Zen Hei"/>
+                <a:latin typeface="PingFang TC"/>
+                <a:ea typeface="PingFang TC"/>
               </a:rPr>
               <a:t>二階曲線形狀</a:t>
             </a:r>
@@ -5886,8 +5886,8 @@
                 <a:solidFill>
                   <a:srgbClr val="262B33"/>
                 </a:solidFill>
-                <a:latin typeface="WenQuanYi Zen Hei"/>
-                <a:ea typeface="WenQuanYi Zen Hei"/>
+                <a:latin typeface="PingFang TC"/>
+                <a:ea typeface="PingFang TC"/>
               </a:rPr>
               <a:t>驗證平均場 m(T/Tc)</a:t>
             </a:r>
@@ -5973,8 +5973,8 @@
                 <a:solidFill>
                   <a:srgbClr val="262B33"/>
                 </a:solidFill>
-                <a:latin typeface="WenQuanYi Zen Hei"/>
-                <a:ea typeface="WenQuanYi Zen Hei"/>
+                <a:latin typeface="PingFang TC"/>
+                <a:ea typeface="PingFang TC"/>
               </a:rPr>
               <a:t>5</a:t>
             </a:r>
@@ -6060,8 +6060,8 @@
                 <a:solidFill>
                   <a:srgbClr val="262B33"/>
                 </a:solidFill>
-                <a:latin typeface="WenQuanYi Zen Hei"/>
-                <a:ea typeface="WenQuanYi Zen Hei"/>
+                <a:latin typeface="PingFang TC"/>
+                <a:ea typeface="PingFang TC"/>
               </a:rPr>
               <a:t>比對文獻 + 回填</a:t>
             </a:r>
@@ -6147,8 +6147,8 @@
                 <a:solidFill>
                   <a:srgbClr val="262B33"/>
                 </a:solidFill>
-                <a:latin typeface="WenQuanYi Zen Hei"/>
-                <a:ea typeface="WenQuanYi Zen Hei"/>
+                <a:latin typeface="PingFang TC"/>
+                <a:ea typeface="PingFang TC"/>
               </a:rPr>
               <a:t>±20% 判定</a:t>
             </a:r>
@@ -6234,8 +6234,8 @@
                 <a:solidFill>
                   <a:srgbClr val="262B33"/>
                 </a:solidFill>
-                <a:latin typeface="WenQuanYi Zen Hei"/>
-                <a:ea typeface="WenQuanYi Zen Hei"/>
+                <a:latin typeface="PingFang TC"/>
+                <a:ea typeface="PingFang TC"/>
               </a:rPr>
               <a:t>決策門 G0</a:t>
             </a:r>
@@ -6339,8 +6339,8 @@
                 <a:solidFill>
                   <a:srgbClr val="2A9D8F"/>
                 </a:solidFill>
-                <a:latin typeface="WenQuanYi Zen Hei"/>
-                <a:ea typeface="WenQuanYi Zen Hei"/>
+                <a:latin typeface="PingFang TC"/>
+                <a:ea typeface="PingFang TC"/>
               </a:rPr>
               <a:t>GATE G0</a:t>
             </a:r>
@@ -6382,8 +6382,8 @@
                 <a:solidFill>
                   <a:srgbClr val="1F3A5F"/>
                 </a:solidFill>
-                <a:latin typeface="WenQuanYi Zen Hei"/>
-                <a:ea typeface="WenQuanYi Zen Hei"/>
+                <a:latin typeface="PingFang TC"/>
+                <a:ea typeface="PingFang TC"/>
               </a:rPr>
               <a:t>決策門 G0：先導通過了嗎？</a:t>
             </a:r>
@@ -6469,8 +6469,8 @@
                 <a:solidFill>
                   <a:srgbClr val="5A6370"/>
                 </a:solidFill>
-                <a:latin typeface="WenQuanYi Zen Hei"/>
-                <a:ea typeface="WenQuanYi Zen Hei"/>
+                <a:latin typeface="PingFang TC"/>
+                <a:ea typeface="PingFang TC"/>
               </a:rPr>
               <a:t>12</a:t>
             </a:r>
@@ -6512,8 +6512,8 @@
                 <a:solidFill>
                   <a:srgbClr val="2A9D8F"/>
                 </a:solidFill>
-                <a:latin typeface="WenQuanYi Zen Hei"/>
-                <a:ea typeface="WenQuanYi Zen Hei"/>
+                <a:latin typeface="PingFang TC"/>
+                <a:ea typeface="PingFang TC"/>
               </a:rPr>
               <a:t>●  通過條件：Gd 的 ΔM(T)、ΔS_M、Tc 與文獻吻合（±20%），且回填流程可復現。</a:t>
             </a:r>
@@ -6532,8 +6532,8 @@
                 <a:solidFill>
                   <a:srgbClr val="262B33"/>
                 </a:solidFill>
-                <a:latin typeface="WenQuanYi Zen Hei"/>
-                <a:ea typeface="WenQuanYi Zen Hei"/>
+                <a:latin typeface="PingFang TC"/>
+                <a:ea typeface="PingFang TC"/>
               </a:rPr>
               <a:t>●  通過 → 進 Phase 1（一階材料），開始投入較貴的合成樣品。</a:t>
             </a:r>
@@ -6552,8 +6552,8 @@
                 <a:solidFill>
                   <a:srgbClr val="E76F51"/>
                 </a:solidFill>
-                <a:latin typeface="WenQuanYi Zen Hei"/>
-                <a:ea typeface="WenQuanYi Zen Hei"/>
+                <a:latin typeface="PingFang TC"/>
+                <a:ea typeface="PingFang TC"/>
               </a:rPr>
               <a:t>●  未過 → 診斷是量測（校準/退火/氧化）還是模型（公式/單位）問題，修正後重做先導。</a:t>
             </a:r>
@@ -6572,8 +6572,8 @@
                 <a:solidFill>
                   <a:srgbClr val="1F3A5F"/>
                 </a:solidFill>
-                <a:latin typeface="WenQuanYi Zen Hei"/>
-                <a:ea typeface="WenQuanYi Zen Hei"/>
+                <a:latin typeface="PingFang TC"/>
+                <a:ea typeface="PingFang TC"/>
               </a:rPr>
               <a:t>●  原則：用最便宜的一步，攔下最貴的錯誤——避免重蹈覆轍。</a:t>
             </a:r>
@@ -6677,8 +6677,8 @@
                 <a:solidFill>
                   <a:srgbClr val="2A9D8F"/>
                 </a:solidFill>
-                <a:latin typeface="WenQuanYi Zen Hei"/>
-                <a:ea typeface="WenQuanYi Zen Hei"/>
+                <a:latin typeface="PingFang TC"/>
+                <a:ea typeface="PingFang TC"/>
               </a:rPr>
               <a:t>PHASE 1</a:t>
             </a:r>
@@ -6720,8 +6720,8 @@
                 <a:solidFill>
                   <a:srgbClr val="1F3A5F"/>
                 </a:solidFill>
-                <a:latin typeface="WenQuanYi Zen Hei"/>
-                <a:ea typeface="WenQuanYi Zen Hei"/>
+                <a:latin typeface="PingFang TC"/>
+                <a:ea typeface="PingFang TC"/>
               </a:rPr>
               <a:t>一階材料：La-Fe-Si / Mn-Fe-P</a:t>
             </a:r>
@@ -6807,8 +6807,8 @@
                 <a:solidFill>
                   <a:srgbClr val="5A6370"/>
                 </a:solidFill>
-                <a:latin typeface="WenQuanYi Zen Hei"/>
-                <a:ea typeface="WenQuanYi Zen Hei"/>
+                <a:latin typeface="PingFang TC"/>
+                <a:ea typeface="PingFang TC"/>
               </a:rPr>
               <a:t>13</a:t>
             </a:r>
@@ -6850,8 +6850,8 @@
                 <a:solidFill>
                   <a:srgbClr val="262B33"/>
                 </a:solidFill>
-                <a:latin typeface="WenQuanYi Zen Hei"/>
-                <a:ea typeface="WenQuanYi Zen Hei"/>
+                <a:latin typeface="PingFang TC"/>
+                <a:ea typeface="PingFang TC"/>
               </a:rPr>
               <a:t>●  對象：La(Fe,Si)13 與 (Mn,Fe)2(P,Si)——真正高 ΔS_M 的一階 MCE 主力。</a:t>
             </a:r>
@@ -6870,8 +6870,8 @@
                 <a:solidFill>
                   <a:srgbClr val="262B33"/>
                 </a:solidFill>
-                <a:latin typeface="WenQuanYi Zen Hei"/>
-                <a:ea typeface="WenQuanYi Zen Hei"/>
+                <a:latin typeface="PingFang TC"/>
+                <a:ea typeface="PingFang TC"/>
               </a:rPr>
               <a:t>●  重點量測：M(T) 銳度 → 校 D5 logistic 寬度 w；ΔS_M → 校 reference_materials。</a:t>
             </a:r>
@@ -6890,8 +6890,8 @@
                 <a:solidFill>
                   <a:srgbClr val="262B33"/>
                 </a:solidFill>
-                <a:latin typeface="WenQuanYi Zen Hei"/>
-                <a:ea typeface="WenQuanYi Zen Hei"/>
+                <a:latin typeface="PingFang TC"/>
+                <a:ea typeface="PingFang TC"/>
               </a:rPr>
               <a:t>●  挑戰：一階相需正確退火/相形成；脆、需小心製樣（與 D9 脆性懲罰呼應）。</a:t>
             </a:r>
@@ -6910,8 +6910,8 @@
                 <a:solidFill>
                   <a:srgbClr val="262B33"/>
                 </a:solidFill>
-                <a:latin typeface="WenQuanYi Zen Hei"/>
-                <a:ea typeface="WenQuanYi Zen Hei"/>
+                <a:latin typeface="PingFang TC"/>
+                <a:ea typeface="PingFang TC"/>
               </a:rPr>
               <a:t>–  故優先委外/與有經驗的實驗室合作，降低製程風險。</a:t>
             </a:r>
@@ -6930,8 +6930,8 @@
                 <a:solidFill>
                   <a:srgbClr val="2A9D8F"/>
                 </a:solidFill>
-                <a:latin typeface="WenQuanYi Zen Hei"/>
-                <a:ea typeface="WenQuanYi Zen Hei"/>
+                <a:latin typeface="PingFang TC"/>
+                <a:ea typeface="PingFang TC"/>
               </a:rPr>
               <a:t>●  規模：2–3 個樣品；先各 1 個成分點驗證，再視結果加成分掃描。</a:t>
             </a:r>
@@ -7035,8 +7035,8 @@
                 <a:solidFill>
                   <a:srgbClr val="2A9D8F"/>
                 </a:solidFill>
-                <a:latin typeface="WenQuanYi Zen Hei"/>
-                <a:ea typeface="WenQuanYi Zen Hei"/>
+                <a:latin typeface="PingFang TC"/>
+                <a:ea typeface="PingFang TC"/>
               </a:rPr>
               <a:t>PHASE 1 · D8</a:t>
             </a:r>
@@ -7078,8 +7078,8 @@
                 <a:solidFill>
                   <a:srgbClr val="1F3A5F"/>
                 </a:solidFill>
-                <a:latin typeface="WenQuanYi Zen Hei"/>
-                <a:ea typeface="WenQuanYi Zen Hei"/>
+                <a:latin typeface="PingFang TC"/>
+                <a:ea typeface="PingFang TC"/>
               </a:rPr>
               <a:t>氫化 Tc 上修驗證</a:t>
             </a:r>
@@ -7165,8 +7165,8 @@
                 <a:solidFill>
                   <a:srgbClr val="5A6370"/>
                 </a:solidFill>
-                <a:latin typeface="WenQuanYi Zen Hei"/>
-                <a:ea typeface="WenQuanYi Zen Hei"/>
+                <a:latin typeface="PingFang TC"/>
+                <a:ea typeface="PingFang TC"/>
               </a:rPr>
               <a:t>14</a:t>
             </a:r>
@@ -7208,8 +7208,8 @@
                 <a:solidFill>
                   <a:srgbClr val="262B33"/>
                 </a:solidFill>
-                <a:latin typeface="WenQuanYi Zen Hei"/>
-                <a:ea typeface="WenQuanYi Zen Hei"/>
+                <a:latin typeface="PingFang TC"/>
+                <a:ea typeface="PingFang TC"/>
               </a:rPr>
               <a:t>●  模型：hydrogenation_tc_shift_K() 預測 La-Fe-Si 吸氫後 Tc 上修 ~50–150K。</a:t>
             </a:r>
@@ -7228,8 +7228,8 @@
                 <a:solidFill>
                   <a:srgbClr val="262B33"/>
                 </a:solidFill>
-                <a:latin typeface="WenQuanYi Zen Hei"/>
-                <a:ea typeface="WenQuanYi Zen Hei"/>
+                <a:latin typeface="PingFang TC"/>
+                <a:ea typeface="PingFang TC"/>
               </a:rPr>
               <a:t>●  實驗：同一 La-Fe-Si 樣品，氫化前後各量 VSM/DSC，比較 Tc 位移。</a:t>
             </a:r>
@@ -7248,8 +7248,8 @@
                 <a:solidFill>
                   <a:srgbClr val="262B33"/>
                 </a:solidFill>
-                <a:latin typeface="WenQuanYi Zen Hei"/>
-                <a:ea typeface="WenQuanYi Zen Hei"/>
+                <a:latin typeface="PingFang TC"/>
+                <a:ea typeface="PingFang TC"/>
               </a:rPr>
               <a:t>●  判準：氫化後 Tc 上移方向正確、量級吻合（±30%）。</a:t>
             </a:r>
@@ -7268,8 +7268,8 @@
                 <a:solidFill>
                   <a:srgbClr val="1F3A5F"/>
                 </a:solidFill>
-                <a:latin typeface="WenQuanYi Zen Hei"/>
-                <a:ea typeface="WenQuanYi Zen Hei"/>
+                <a:latin typeface="PingFang TC"/>
+                <a:ea typeface="PingFang TC"/>
               </a:rPr>
               <a:t>●  價值：驗證 D8 把『近室溫材料』調到『廢熱溫區』的可行性（解 D10 溫區匹配）。</a:t>
             </a:r>
@@ -7373,8 +7373,8 @@
                 <a:solidFill>
                   <a:srgbClr val="2A9D8F"/>
                 </a:solidFill>
-                <a:latin typeface="WenQuanYi Zen Hei"/>
-                <a:ea typeface="WenQuanYi Zen Hei"/>
+                <a:latin typeface="PingFang TC"/>
+                <a:ea typeface="PingFang TC"/>
               </a:rPr>
               <a:t>PHASE 2</a:t>
             </a:r>
@@ -7416,8 +7416,8 @@
                 <a:solidFill>
                   <a:srgbClr val="1F3A5F"/>
                 </a:solidFill>
-                <a:latin typeface="WenQuanYi Zen Hei"/>
-                <a:ea typeface="WenQuanYi Zen Hei"/>
+                <a:latin typeface="PingFang TC"/>
+                <a:ea typeface="PingFang TC"/>
               </a:rPr>
               <a:t>GA 候選端到端 + 複合 connectivity</a:t>
             </a:r>
@@ -7503,8 +7503,8 @@
                 <a:solidFill>
                   <a:srgbClr val="5A6370"/>
                 </a:solidFill>
-                <a:latin typeface="WenQuanYi Zen Hei"/>
-                <a:ea typeface="WenQuanYi Zen Hei"/>
+                <a:latin typeface="PingFang TC"/>
+                <a:ea typeface="PingFang TC"/>
               </a:rPr>
               <a:t>15</a:t>
             </a:r>
@@ -7546,8 +7546,8 @@
                 <a:solidFill>
                   <a:srgbClr val="262B33"/>
                 </a:solidFill>
-                <a:latin typeface="WenQuanYi Zen Hei"/>
-                <a:ea typeface="WenQuanYi Zen Hei"/>
+                <a:latin typeface="PingFang TC"/>
+                <a:ea typeface="PingFang TC"/>
               </a:rPr>
               <a:t>●  GA 候選：用烘焙好的 bundle_real_tc（真實 Tc）跑 run_search，取 Top 1–2 Fe 系配方。</a:t>
             </a:r>
@@ -7566,8 +7566,8 @@
                 <a:solidFill>
                   <a:srgbClr val="262B33"/>
                 </a:solidFill>
-                <a:latin typeface="WenQuanYi Zen Hei"/>
-                <a:ea typeface="WenQuanYi Zen Hei"/>
+                <a:latin typeface="PingFang TC"/>
+                <a:ea typeface="PingFang TC"/>
               </a:rPr>
               <a:t>–  電弧熔煉自製 → 量 Tc/Br/σy → 比對模型預測（端到端 sim-to-real 驗證）。</a:t>
             </a:r>
@@ -7586,8 +7586,8 @@
                 <a:solidFill>
                   <a:srgbClr val="262B33"/>
                 </a:solidFill>
-                <a:latin typeface="WenQuanYi Zen Hei"/>
-                <a:ea typeface="WenQuanYi Zen Hei"/>
+                <a:latin typeface="PingFang TC"/>
+                <a:ea typeface="PingFang TC"/>
               </a:rPr>
               <a:t>●  複合 connectivity（D6 最敏感參數）：製備高κ基底+一階相複合，SEM 量真實連通度。</a:t>
             </a:r>
@@ -7606,8 +7606,8 @@
                 <a:solidFill>
                   <a:srgbClr val="262B33"/>
                 </a:solidFill>
-                <a:latin typeface="WenQuanYi Zen Hei"/>
-                <a:ea typeface="WenQuanYi Zen Hei"/>
+                <a:latin typeface="PingFang TC"/>
+                <a:ea typeface="PingFang TC"/>
               </a:rPr>
               <a:t>–  回填 composite.py connectivity，收斂功率增益的絕對值（現為 ×7.6–×11.8 帶）。</a:t>
             </a:r>
@@ -7626,8 +7626,8 @@
                 <a:solidFill>
                   <a:srgbClr val="2A9D8F"/>
                 </a:solidFill>
-                <a:latin typeface="WenQuanYi Zen Hei"/>
-                <a:ea typeface="WenQuanYi Zen Hei"/>
+                <a:latin typeface="PingFang TC"/>
+                <a:ea typeface="PingFang TC"/>
               </a:rPr>
               <a:t>●  規模：~6 樣（GA 候選 + 複合系列）。</a:t>
             </a:r>
@@ -7731,8 +7731,8 @@
                 <a:solidFill>
                   <a:srgbClr val="2A9D8F"/>
                 </a:solidFill>
-                <a:latin typeface="WenQuanYi Zen Hei"/>
-                <a:ea typeface="WenQuanYi Zen Hei"/>
+                <a:latin typeface="PingFang TC"/>
+                <a:ea typeface="PingFang TC"/>
               </a:rPr>
               <a:t>PHASE 3</a:t>
             </a:r>
@@ -7774,8 +7774,8 @@
                 <a:solidFill>
                   <a:srgbClr val="1F3A5F"/>
                 </a:solidFill>
-                <a:latin typeface="WenQuanYi Zen Hei"/>
-                <a:ea typeface="WenQuanYi Zen Hei"/>
+                <a:latin typeface="PingFang TC"/>
+                <a:ea typeface="PingFang TC"/>
               </a:rPr>
               <a:t>整機 TMG 原型（發電側絕對校準）</a:t>
             </a:r>
@@ -7861,8 +7861,8 @@
                 <a:solidFill>
                   <a:srgbClr val="5A6370"/>
                 </a:solidFill>
-                <a:latin typeface="WenQuanYi Zen Hei"/>
-                <a:ea typeface="WenQuanYi Zen Hei"/>
+                <a:latin typeface="PingFang TC"/>
+                <a:ea typeface="PingFang TC"/>
               </a:rPr>
               <a:t>16</a:t>
             </a:r>
@@ -7904,8 +7904,8 @@
                 <a:solidFill>
                   <a:srgbClr val="262B33"/>
                 </a:solidFill>
-                <a:latin typeface="WenQuanYi Zen Hei"/>
-                <a:ea typeface="WenQuanYi Zen Hei"/>
+                <a:latin typeface="PingFang TC"/>
+                <a:ea typeface="PingFang TC"/>
               </a:rPr>
               <a:t>●  目標：自製小型 TMG 原型，量測真實 W / η / P-V。</a:t>
             </a:r>
@@ -7924,8 +7924,8 @@
                 <a:solidFill>
                   <a:srgbClr val="262B33"/>
                 </a:solidFill>
-                <a:latin typeface="WenQuanYi Zen Hei"/>
-                <a:ea typeface="WenQuanYi Zen Hei"/>
+                <a:latin typeface="PingFang TC"/>
+                <a:ea typeface="PingFang TC"/>
               </a:rPr>
               <a:t>●  用前面校準好的最佳材料（一階 + 複合），在實際磁路/熱循環下運轉。</a:t>
             </a:r>
@@ -7944,8 +7944,8 @@
                 <a:solidFill>
                   <a:srgbClr val="262B33"/>
                 </a:solidFill>
-                <a:latin typeface="WenQuanYi Zen Hei"/>
-                <a:ea typeface="WenQuanYi Zen Hei"/>
+                <a:latin typeface="PingFang TC"/>
+                <a:ea typeface="PingFang TC"/>
               </a:rPr>
               <a:t>●  把結果新增為 reference_devices.py 的『本工作』錨點 → 收斂 D12 的 ~10× 落差。</a:t>
             </a:r>
@@ -7964,8 +7964,8 @@
                 <a:solidFill>
                   <a:srgbClr val="E76F51"/>
                 </a:solidFill>
-                <a:latin typeface="WenQuanYi Zen Hei"/>
-                <a:ea typeface="WenQuanYi Zen Hei"/>
+                <a:latin typeface="PingFang TC"/>
+                <a:ea typeface="PingFang TC"/>
               </a:rPr>
               <a:t>●  這是最大工程量、放最後做——前三階段全綠燈才啟動。</a:t>
             </a:r>
@@ -7984,8 +7984,8 @@
                 <a:solidFill>
                   <a:srgbClr val="1F3A5F"/>
                 </a:solidFill>
-                <a:latin typeface="WenQuanYi Zen Hei"/>
-                <a:ea typeface="WenQuanYi Zen Hei"/>
+                <a:latin typeface="PingFang TC"/>
+                <a:ea typeface="PingFang TC"/>
               </a:rPr>
               <a:t>●  成果：整機絕對功率/效率可預測，模型從『相對工具』升級為『絕對預測』。</a:t>
             </a:r>
@@ -8089,8 +8089,8 @@
                 <a:solidFill>
                   <a:srgbClr val="2A9D8F"/>
                 </a:solidFill>
-                <a:latin typeface="WenQuanYi Zen Hei"/>
-                <a:ea typeface="WenQuanYi Zen Hei"/>
+                <a:latin typeface="PingFang TC"/>
+                <a:ea typeface="PingFang TC"/>
               </a:rPr>
               <a:t>MEASUREMENT MATRIX</a:t>
             </a:r>
@@ -8132,8 +8132,8 @@
                 <a:solidFill>
                   <a:srgbClr val="1F3A5F"/>
                 </a:solidFill>
-                <a:latin typeface="WenQuanYi Zen Hei"/>
-                <a:ea typeface="WenQuanYi Zen Hei"/>
+                <a:latin typeface="PingFang TC"/>
+                <a:ea typeface="PingFang TC"/>
               </a:rPr>
               <a:t>量測矩陣（設備 × 測項）</a:t>
             </a:r>
@@ -8219,8 +8219,8 @@
                 <a:solidFill>
                   <a:srgbClr val="5A6370"/>
                 </a:solidFill>
-                <a:latin typeface="WenQuanYi Zen Hei"/>
-                <a:ea typeface="WenQuanYi Zen Hei"/>
+                <a:latin typeface="PingFang TC"/>
+                <a:ea typeface="PingFang TC"/>
               </a:rPr>
               <a:t>17</a:t>
             </a:r>
@@ -8306,8 +8306,8 @@
                 <a:solidFill>
                   <a:srgbClr val="FFFFFF"/>
                 </a:solidFill>
-                <a:latin typeface="WenQuanYi Zen Hei"/>
-                <a:ea typeface="WenQuanYi Zen Hei"/>
+                <a:latin typeface="PingFang TC"/>
+                <a:ea typeface="PingFang TC"/>
               </a:rPr>
               <a:t>設備</a:t>
             </a:r>
@@ -8393,8 +8393,8 @@
                 <a:solidFill>
                   <a:srgbClr val="FFFFFF"/>
                 </a:solidFill>
-                <a:latin typeface="WenQuanYi Zen Hei"/>
-                <a:ea typeface="WenQuanYi Zen Hei"/>
+                <a:latin typeface="PingFang TC"/>
+                <a:ea typeface="PingFang TC"/>
               </a:rPr>
               <a:t>測項</a:t>
             </a:r>
@@ -8480,8 +8480,8 @@
                 <a:solidFill>
                   <a:srgbClr val="FFFFFF"/>
                 </a:solidFill>
-                <a:latin typeface="WenQuanYi Zen Hei"/>
-                <a:ea typeface="WenQuanYi Zen Hei"/>
+                <a:latin typeface="PingFang TC"/>
+                <a:ea typeface="PingFang TC"/>
               </a:rPr>
               <a:t>輸出</a:t>
             </a:r>
@@ -8567,8 +8567,8 @@
                 <a:solidFill>
                   <a:srgbClr val="FFFFFF"/>
                 </a:solidFill>
-                <a:latin typeface="WenQuanYi Zen Hei"/>
-                <a:ea typeface="WenQuanYi Zen Hei"/>
+                <a:latin typeface="PingFang TC"/>
+                <a:ea typeface="PingFang TC"/>
               </a:rPr>
               <a:t>可得性</a:t>
             </a:r>
@@ -8654,8 +8654,8 @@
                 <a:solidFill>
                   <a:srgbClr val="262B33"/>
                 </a:solidFill>
-                <a:latin typeface="WenQuanYi Zen Hei"/>
-                <a:ea typeface="WenQuanYi Zen Hei"/>
+                <a:latin typeface="PingFang TC"/>
+                <a:ea typeface="PingFang TC"/>
               </a:rPr>
               <a:t>EDS / XRD</a:t>
             </a:r>
@@ -8741,8 +8741,8 @@
                 <a:solidFill>
                   <a:srgbClr val="262B33"/>
                 </a:solidFill>
-                <a:latin typeface="WenQuanYi Zen Hei"/>
-                <a:ea typeface="WenQuanYi Zen Hei"/>
+                <a:latin typeface="PingFang TC"/>
+                <a:ea typeface="PingFang TC"/>
               </a:rPr>
               <a:t>成分 / 相</a:t>
             </a:r>
@@ -8828,8 +8828,8 @@
                 <a:solidFill>
                   <a:srgbClr val="262B33"/>
                 </a:solidFill>
-                <a:latin typeface="WenQuanYi Zen Hei"/>
-                <a:ea typeface="WenQuanYi Zen Hei"/>
+                <a:latin typeface="PingFang TC"/>
+                <a:ea typeface="PingFang TC"/>
               </a:rPr>
               <a:t>純度、相確認</a:t>
             </a:r>
@@ -8915,8 +8915,8 @@
                 <a:solidFill>
                   <a:srgbClr val="262B33"/>
                 </a:solidFill>
-                <a:latin typeface="WenQuanYi Zen Hei"/>
-                <a:ea typeface="WenQuanYi Zen Hei"/>
+                <a:latin typeface="PingFang TC"/>
+                <a:ea typeface="PingFang TC"/>
               </a:rPr>
               <a:t>高（常見）</a:t>
             </a:r>
@@ -9002,8 +9002,8 @@
                 <a:solidFill>
                   <a:srgbClr val="262B33"/>
                 </a:solidFill>
-                <a:latin typeface="WenQuanYi Zen Hei"/>
-                <a:ea typeface="WenQuanYi Zen Hei"/>
+                <a:latin typeface="PingFang TC"/>
+                <a:ea typeface="PingFang TC"/>
               </a:rPr>
               <a:t>VSM / PPMS</a:t>
             </a:r>
@@ -9089,8 +9089,8 @@
                 <a:solidFill>
                   <a:srgbClr val="262B33"/>
                 </a:solidFill>
-                <a:latin typeface="WenQuanYi Zen Hei"/>
-                <a:ea typeface="WenQuanYi Zen Hei"/>
+                <a:latin typeface="PingFang TC"/>
+                <a:ea typeface="PingFang TC"/>
               </a:rPr>
               <a:t>M-H 迴線 / M(T)</a:t>
             </a:r>
@@ -9176,8 +9176,8 @@
                 <a:solidFill>
                   <a:srgbClr val="262B33"/>
                 </a:solidFill>
-                <a:latin typeface="WenQuanYi Zen Hei"/>
-                <a:ea typeface="WenQuanYi Zen Hei"/>
+                <a:latin typeface="PingFang TC"/>
+                <a:ea typeface="PingFang TC"/>
               </a:rPr>
               <a:t>ΔJ、磁滯、w</a:t>
             </a:r>
@@ -9263,8 +9263,8 @@
                 <a:solidFill>
                   <a:srgbClr val="262B33"/>
                 </a:solidFill>
-                <a:latin typeface="WenQuanYi Zen Hei"/>
-                <a:ea typeface="WenQuanYi Zen Hei"/>
+                <a:latin typeface="PingFang TC"/>
+                <a:ea typeface="PingFang TC"/>
               </a:rPr>
               <a:t>中（需磁量測）</a:t>
             </a:r>
@@ -9350,8 +9350,8 @@
                 <a:solidFill>
                   <a:srgbClr val="262B33"/>
                 </a:solidFill>
-                <a:latin typeface="WenQuanYi Zen Hei"/>
-                <a:ea typeface="WenQuanYi Zen Hei"/>
+                <a:latin typeface="PingFang TC"/>
+                <a:ea typeface="PingFang TC"/>
               </a:rPr>
               <a:t>DSC</a:t>
             </a:r>
@@ -9437,8 +9437,8 @@
                 <a:solidFill>
                   <a:srgbClr val="262B33"/>
                 </a:solidFill>
-                <a:latin typeface="WenQuanYi Zen Hei"/>
-                <a:ea typeface="WenQuanYi Zen Hei"/>
+                <a:latin typeface="PingFang TC"/>
+                <a:ea typeface="PingFang TC"/>
               </a:rPr>
               <a:t>ΔS_M / Cp / Tc</a:t>
             </a:r>
@@ -9524,8 +9524,8 @@
                 <a:solidFill>
                   <a:srgbClr val="262B33"/>
                 </a:solidFill>
-                <a:latin typeface="WenQuanYi Zen Hei"/>
-                <a:ea typeface="WenQuanYi Zen Hei"/>
+                <a:latin typeface="PingFang TC"/>
+                <a:ea typeface="PingFang TC"/>
               </a:rPr>
               <a:t>熱量、相變峰</a:t>
             </a:r>
@@ -9611,8 +9611,8 @@
                 <a:solidFill>
                   <a:srgbClr val="262B33"/>
                 </a:solidFill>
-                <a:latin typeface="WenQuanYi Zen Hei"/>
-                <a:ea typeface="WenQuanYi Zen Hei"/>
+                <a:latin typeface="PingFang TC"/>
+                <a:ea typeface="PingFang TC"/>
               </a:rPr>
               <a:t>中</a:t>
             </a:r>
@@ -9698,8 +9698,8 @@
                 <a:solidFill>
                   <a:srgbClr val="262B33"/>
                 </a:solidFill>
-                <a:latin typeface="WenQuanYi Zen Hei"/>
-                <a:ea typeface="WenQuanYi Zen Hei"/>
+                <a:latin typeface="PingFang TC"/>
+                <a:ea typeface="PingFang TC"/>
               </a:rPr>
               <a:t>雷射閃光</a:t>
             </a:r>
@@ -9785,8 +9785,8 @@
                 <a:solidFill>
                   <a:srgbClr val="262B33"/>
                 </a:solidFill>
-                <a:latin typeface="WenQuanYi Zen Hei"/>
-                <a:ea typeface="WenQuanYi Zen Hei"/>
+                <a:latin typeface="PingFang TC"/>
+                <a:ea typeface="PingFang TC"/>
               </a:rPr>
               <a:t>熱擴散 α</a:t>
             </a:r>
@@ -9872,8 +9872,8 @@
                 <a:solidFill>
                   <a:srgbClr val="262B33"/>
                 </a:solidFill>
-                <a:latin typeface="WenQuanYi Zen Hei"/>
-                <a:ea typeface="WenQuanYi Zen Hei"/>
+                <a:latin typeface="PingFang TC"/>
+                <a:ea typeface="PingFang TC"/>
               </a:rPr>
               <a:t>κ</a:t>
             </a:r>
@@ -9959,8 +9959,8 @@
                 <a:solidFill>
                   <a:srgbClr val="262B33"/>
                 </a:solidFill>
-                <a:latin typeface="WenQuanYi Zen Hei"/>
-                <a:ea typeface="WenQuanYi Zen Hei"/>
+                <a:latin typeface="PingFang TC"/>
+                <a:ea typeface="PingFang TC"/>
               </a:rPr>
               <a:t>中</a:t>
             </a:r>
@@ -10046,8 +10046,8 @@
                 <a:solidFill>
                   <a:srgbClr val="262B33"/>
                 </a:solidFill>
-                <a:latin typeface="WenQuanYi Zen Hei"/>
-                <a:ea typeface="WenQuanYi Zen Hei"/>
+                <a:latin typeface="PingFang TC"/>
+                <a:ea typeface="PingFang TC"/>
               </a:rPr>
               <a:t>SEM</a:t>
             </a:r>
@@ -10133,8 +10133,8 @@
                 <a:solidFill>
                   <a:srgbClr val="262B33"/>
                 </a:solidFill>
-                <a:latin typeface="WenQuanYi Zen Hei"/>
-                <a:ea typeface="WenQuanYi Zen Hei"/>
+                <a:latin typeface="PingFang TC"/>
+                <a:ea typeface="PingFang TC"/>
               </a:rPr>
               <a:t>微結構 / 連通度</a:t>
             </a:r>
@@ -10220,8 +10220,8 @@
                 <a:solidFill>
                   <a:srgbClr val="262B33"/>
                 </a:solidFill>
-                <a:latin typeface="WenQuanYi Zen Hei"/>
-                <a:ea typeface="WenQuanYi Zen Hei"/>
+                <a:latin typeface="PingFang TC"/>
+                <a:ea typeface="PingFang TC"/>
               </a:rPr>
               <a:t>connectivity、φ</a:t>
             </a:r>
@@ -10307,8 +10307,8 @@
                 <a:solidFill>
                   <a:srgbClr val="262B33"/>
                 </a:solidFill>
-                <a:latin typeface="WenQuanYi Zen Hei"/>
-                <a:ea typeface="WenQuanYi Zen Hei"/>
+                <a:latin typeface="PingFang TC"/>
+                <a:ea typeface="PingFang TC"/>
               </a:rPr>
               <a:t>高</a:t>
             </a:r>
@@ -10394,8 +10394,8 @@
                 <a:solidFill>
                   <a:srgbClr val="262B33"/>
                 </a:solidFill>
-                <a:latin typeface="WenQuanYi Zen Hei"/>
-                <a:ea typeface="WenQuanYi Zen Hei"/>
+                <a:latin typeface="PingFang TC"/>
+                <a:ea typeface="PingFang TC"/>
               </a:rPr>
               <a:t>自製 TMG 台</a:t>
             </a:r>
@@ -10481,8 +10481,8 @@
                 <a:solidFill>
                   <a:srgbClr val="262B33"/>
                 </a:solidFill>
-                <a:latin typeface="WenQuanYi Zen Hei"/>
-                <a:ea typeface="WenQuanYi Zen Hei"/>
+                <a:latin typeface="PingFang TC"/>
+                <a:ea typeface="PingFang TC"/>
               </a:rPr>
               <a:t>W / η / P</a:t>
             </a:r>
@@ -10568,8 +10568,8 @@
                 <a:solidFill>
                   <a:srgbClr val="262B33"/>
                 </a:solidFill>
-                <a:latin typeface="WenQuanYi Zen Hei"/>
-                <a:ea typeface="WenQuanYi Zen Hei"/>
+                <a:latin typeface="PingFang TC"/>
+                <a:ea typeface="PingFang TC"/>
               </a:rPr>
               <a:t>整機效能</a:t>
             </a:r>
@@ -10655,8 +10655,8 @@
                 <a:solidFill>
                   <a:srgbClr val="262B33"/>
                 </a:solidFill>
-                <a:latin typeface="WenQuanYi Zen Hei"/>
-                <a:ea typeface="WenQuanYi Zen Hei"/>
+                <a:latin typeface="PingFang TC"/>
+                <a:ea typeface="PingFang TC"/>
               </a:rPr>
               <a:t>低（工程）</a:t>
             </a:r>
@@ -10760,8 +10760,8 @@
                 <a:solidFill>
                   <a:srgbClr val="2A9D8F"/>
                 </a:solidFill>
-                <a:latin typeface="WenQuanYi Zen Hei"/>
-                <a:ea typeface="WenQuanYi Zen Hei"/>
+                <a:latin typeface="PingFang TC"/>
+                <a:ea typeface="PingFang TC"/>
               </a:rPr>
               <a:t>CLOSED LOOP</a:t>
             </a:r>
@@ -10803,8 +10803,8 @@
                 <a:solidFill>
                   <a:srgbClr val="1F3A5F"/>
                 </a:solidFill>
-                <a:latin typeface="WenQuanYi Zen Hei"/>
-                <a:ea typeface="WenQuanYi Zen Hei"/>
+                <a:latin typeface="PingFang TC"/>
+                <a:ea typeface="PingFang TC"/>
               </a:rPr>
               <a:t>量到什麼 → 回填模型哪裡</a:t>
             </a:r>
@@ -10890,8 +10890,8 @@
                 <a:solidFill>
                   <a:srgbClr val="5A6370"/>
                 </a:solidFill>
-                <a:latin typeface="WenQuanYi Zen Hei"/>
-                <a:ea typeface="WenQuanYi Zen Hei"/>
+                <a:latin typeface="PingFang TC"/>
+                <a:ea typeface="PingFang TC"/>
               </a:rPr>
               <a:t>18</a:t>
             </a:r>
@@ -11019,8 +11019,8 @@
                 <a:solidFill>
                   <a:srgbClr val="2A9D8F"/>
                 </a:solidFill>
-                <a:latin typeface="WenQuanYi Zen Hei"/>
-                <a:ea typeface="WenQuanYi Zen Hei"/>
+                <a:latin typeface="PingFang TC"/>
+                <a:ea typeface="PingFang TC"/>
               </a:rPr>
               <a:t>TIMELINE</a:t>
             </a:r>
@@ -11062,8 +11062,8 @@
                 <a:solidFill>
                   <a:srgbClr val="1F3A5F"/>
                 </a:solidFill>
-                <a:latin typeface="WenQuanYi Zen Hei"/>
-                <a:ea typeface="WenQuanYi Zen Hei"/>
+                <a:latin typeface="PingFang TC"/>
+                <a:ea typeface="PingFang TC"/>
               </a:rPr>
               <a:t>時程（階段化 Gantt）</a:t>
             </a:r>
@@ -11149,8 +11149,8 @@
                 <a:solidFill>
                   <a:srgbClr val="5A6370"/>
                 </a:solidFill>
-                <a:latin typeface="WenQuanYi Zen Hei"/>
-                <a:ea typeface="WenQuanYi Zen Hei"/>
+                <a:latin typeface="PingFang TC"/>
+                <a:ea typeface="PingFang TC"/>
               </a:rPr>
               <a:t>19</a:t>
             </a:r>
@@ -11278,8 +11278,8 @@
                 <a:solidFill>
                   <a:srgbClr val="2A9D8F"/>
                 </a:solidFill>
-                <a:latin typeface="WenQuanYi Zen Hei"/>
-                <a:ea typeface="WenQuanYi Zen Hei"/>
+                <a:latin typeface="PingFang TC"/>
+                <a:ea typeface="PingFang TC"/>
               </a:rPr>
               <a:t>EXECUTIVE SUMMARY</a:t>
             </a:r>
@@ -11321,8 +11321,8 @@
                 <a:solidFill>
                   <a:srgbClr val="1F3A5F"/>
                 </a:solidFill>
-                <a:latin typeface="WenQuanYi Zen Hei"/>
-                <a:ea typeface="WenQuanYi Zen Hei"/>
+                <a:latin typeface="PingFang TC"/>
+                <a:ea typeface="PingFang TC"/>
               </a:rPr>
               <a:t>計畫一句話</a:t>
             </a:r>
@@ -11408,8 +11408,8 @@
                 <a:solidFill>
                   <a:srgbClr val="5A6370"/>
                 </a:solidFill>
-                <a:latin typeface="WenQuanYi Zen Hei"/>
-                <a:ea typeface="WenQuanYi Zen Hei"/>
+                <a:latin typeface="PingFang TC"/>
+                <a:ea typeface="PingFang TC"/>
               </a:rPr>
               <a:t>02</a:t>
             </a:r>
@@ -11451,8 +11451,8 @@
                 <a:solidFill>
                   <a:srgbClr val="262B33"/>
                 </a:solidFill>
-                <a:latin typeface="WenQuanYi Zen Hei"/>
-                <a:ea typeface="WenQuanYi Zen Hei"/>
+                <a:latin typeface="PingFang TC"/>
+                <a:ea typeface="PingFang TC"/>
               </a:rPr>
               <a:t>模型已把第一性原理 + 公開資料能做的都做完，剩下唯有實測能解。</a:t>
             </a:r>
@@ -11471,8 +11471,8 @@
                 <a:solidFill>
                   <a:srgbClr val="1F3A5F"/>
                 </a:solidFill>
-                <a:latin typeface="WenQuanYi Zen Hei"/>
-                <a:ea typeface="WenQuanYi Zen Hei"/>
+                <a:latin typeface="PingFang TC"/>
+                <a:ea typeface="PingFang TC"/>
               </a:rPr>
               <a:t>策略：先用最易取得的『純 Gd』打通整條量測—回填流程（最小成本驗證可行性），</a:t>
             </a:r>
@@ -11491,8 +11491,8 @@
                 <a:solidFill>
                   <a:srgbClr val="262B33"/>
                 </a:solidFill>
-                <a:latin typeface="WenQuanYi Zen Hei"/>
-                <a:ea typeface="WenQuanYi Zen Hei"/>
+                <a:latin typeface="PingFang TC"/>
+                <a:ea typeface="PingFang TC"/>
               </a:rPr>
               <a:t>通過決策門後再逐步擴張到一階材料、GA 候選、複合與整機原型。</a:t>
             </a:r>
@@ -11620,8 +11620,8 @@
                 <a:solidFill>
                   <a:srgbClr val="2A9D8F"/>
                 </a:solidFill>
-                <a:latin typeface="WenQuanYi Zen Hei"/>
-                <a:ea typeface="WenQuanYi Zen Hei"/>
+                <a:latin typeface="PingFang TC"/>
+                <a:ea typeface="PingFang TC"/>
               </a:rPr>
               <a:t>MILESTONES</a:t>
             </a:r>
@@ -11663,8 +11663,8 @@
                 <a:solidFill>
                   <a:srgbClr val="1F3A5F"/>
                 </a:solidFill>
-                <a:latin typeface="WenQuanYi Zen Hei"/>
-                <a:ea typeface="WenQuanYi Zen Hei"/>
+                <a:latin typeface="PingFang TC"/>
+                <a:ea typeface="PingFang TC"/>
               </a:rPr>
               <a:t>里程碑與決策門</a:t>
             </a:r>
@@ -11750,8 +11750,8 @@
                 <a:solidFill>
                   <a:srgbClr val="5A6370"/>
                 </a:solidFill>
-                <a:latin typeface="WenQuanYi Zen Hei"/>
-                <a:ea typeface="WenQuanYi Zen Hei"/>
+                <a:latin typeface="PingFang TC"/>
+                <a:ea typeface="PingFang TC"/>
               </a:rPr>
               <a:t>20</a:t>
             </a:r>
@@ -11837,8 +11837,8 @@
                 <a:solidFill>
                   <a:srgbClr val="FFFFFF"/>
                 </a:solidFill>
-                <a:latin typeface="WenQuanYi Zen Hei"/>
-                <a:ea typeface="WenQuanYi Zen Hei"/>
+                <a:latin typeface="PingFang TC"/>
+                <a:ea typeface="PingFang TC"/>
               </a:rPr>
               <a:t>月</a:t>
             </a:r>
@@ -11924,8 +11924,8 @@
                 <a:solidFill>
                   <a:srgbClr val="FFFFFF"/>
                 </a:solidFill>
-                <a:latin typeface="WenQuanYi Zen Hei"/>
-                <a:ea typeface="WenQuanYi Zen Hei"/>
+                <a:latin typeface="PingFang TC"/>
+                <a:ea typeface="PingFang TC"/>
               </a:rPr>
               <a:t>里程碑</a:t>
             </a:r>
@@ -12011,8 +12011,8 @@
                 <a:solidFill>
                   <a:srgbClr val="FFFFFF"/>
                 </a:solidFill>
-                <a:latin typeface="WenQuanYi Zen Hei"/>
-                <a:ea typeface="WenQuanYi Zen Hei"/>
+                <a:latin typeface="PingFang TC"/>
+                <a:ea typeface="PingFang TC"/>
               </a:rPr>
               <a:t>內容</a:t>
             </a:r>
@@ -12098,8 +12098,8 @@
                 <a:solidFill>
                   <a:srgbClr val="FFFFFF"/>
                 </a:solidFill>
-                <a:latin typeface="WenQuanYi Zen Hei"/>
-                <a:ea typeface="WenQuanYi Zen Hei"/>
+                <a:latin typeface="PingFang TC"/>
+                <a:ea typeface="PingFang TC"/>
               </a:rPr>
               <a:t>決策門</a:t>
             </a:r>
@@ -12185,8 +12185,8 @@
                 <a:solidFill>
                   <a:srgbClr val="262B33"/>
                 </a:solidFill>
-                <a:latin typeface="WenQuanYi Zen Hei"/>
-                <a:ea typeface="WenQuanYi Zen Hei"/>
+                <a:latin typeface="PingFang TC"/>
+                <a:ea typeface="PingFang TC"/>
               </a:rPr>
               <a:t>M2</a:t>
             </a:r>
@@ -12272,8 +12272,8 @@
                 <a:solidFill>
                   <a:srgbClr val="262B33"/>
                 </a:solidFill>
-                <a:latin typeface="WenQuanYi Zen Hei"/>
-                <a:ea typeface="WenQuanYi Zen Hei"/>
+                <a:latin typeface="PingFang TC"/>
+                <a:ea typeface="PingFang TC"/>
               </a:rPr>
               <a:t>先導完成</a:t>
             </a:r>
@@ -12359,8 +12359,8 @@
                 <a:solidFill>
                   <a:srgbClr val="262B33"/>
                 </a:solidFill>
-                <a:latin typeface="WenQuanYi Zen Hei"/>
-                <a:ea typeface="WenQuanYi Zen Hei"/>
+                <a:latin typeface="PingFang TC"/>
+                <a:ea typeface="PingFang TC"/>
               </a:rPr>
               <a:t>Gd 流程打通、回填驗證</a:t>
             </a:r>
@@ -12446,8 +12446,8 @@
                 <a:solidFill>
                   <a:srgbClr val="262B33"/>
                 </a:solidFill>
-                <a:latin typeface="WenQuanYi Zen Hei"/>
-                <a:ea typeface="WenQuanYi Zen Hei"/>
+                <a:latin typeface="PingFang TC"/>
+                <a:ea typeface="PingFang TC"/>
               </a:rPr>
               <a:t>G0 go/no-go</a:t>
             </a:r>
@@ -12533,8 +12533,8 @@
                 <a:solidFill>
                   <a:srgbClr val="262B33"/>
                 </a:solidFill>
-                <a:latin typeface="WenQuanYi Zen Hei"/>
-                <a:ea typeface="WenQuanYi Zen Hei"/>
+                <a:latin typeface="PingFang TC"/>
+                <a:ea typeface="PingFang TC"/>
               </a:rPr>
               <a:t>M5</a:t>
             </a:r>
@@ -12620,8 +12620,8 @@
                 <a:solidFill>
                   <a:srgbClr val="262B33"/>
                 </a:solidFill>
-                <a:latin typeface="WenQuanYi Zen Hei"/>
-                <a:ea typeface="WenQuanYi Zen Hei"/>
+                <a:latin typeface="PingFang TC"/>
+                <a:ea typeface="PingFang TC"/>
               </a:rPr>
               <a:t>一階驗證</a:t>
             </a:r>
@@ -12707,8 +12707,8 @@
                 <a:solidFill>
                   <a:srgbClr val="262B33"/>
                 </a:solidFill>
-                <a:latin typeface="WenQuanYi Zen Hei"/>
-                <a:ea typeface="WenQuanYi Zen Hei"/>
+                <a:latin typeface="PingFang TC"/>
+                <a:ea typeface="PingFang TC"/>
               </a:rPr>
               <a:t>La-Fe-Si/Mn-Fe-P + 氫化</a:t>
             </a:r>
@@ -12794,8 +12794,8 @@
                 <a:solidFill>
                   <a:srgbClr val="262B33"/>
                 </a:solidFill>
-                <a:latin typeface="WenQuanYi Zen Hei"/>
-                <a:ea typeface="WenQuanYi Zen Hei"/>
+                <a:latin typeface="PingFang TC"/>
+                <a:ea typeface="PingFang TC"/>
               </a:rPr>
               <a:t>—</a:t>
             </a:r>
@@ -12881,8 +12881,8 @@
                 <a:solidFill>
                   <a:srgbClr val="262B33"/>
                 </a:solidFill>
-                <a:latin typeface="WenQuanYi Zen Hei"/>
-                <a:ea typeface="WenQuanYi Zen Hei"/>
+                <a:latin typeface="PingFang TC"/>
+                <a:ea typeface="PingFang TC"/>
               </a:rPr>
               <a:t>M8</a:t>
             </a:r>
@@ -12968,8 +12968,8 @@
                 <a:solidFill>
                   <a:srgbClr val="262B33"/>
                 </a:solidFill>
-                <a:latin typeface="WenQuanYi Zen Hei"/>
-                <a:ea typeface="WenQuanYi Zen Hei"/>
+                <a:latin typeface="PingFang TC"/>
+                <a:ea typeface="PingFang TC"/>
               </a:rPr>
               <a:t>端到端</a:t>
             </a:r>
@@ -13055,8 +13055,8 @@
                 <a:solidFill>
                   <a:srgbClr val="262B33"/>
                 </a:solidFill>
-                <a:latin typeface="WenQuanYi Zen Hei"/>
-                <a:ea typeface="WenQuanYi Zen Hei"/>
+                <a:latin typeface="PingFang TC"/>
+                <a:ea typeface="PingFang TC"/>
               </a:rPr>
               <a:t>GA 候選 + 複合 connectivity</a:t>
             </a:r>
@@ -13142,8 +13142,8 @@
                 <a:solidFill>
                   <a:srgbClr val="262B33"/>
                 </a:solidFill>
-                <a:latin typeface="WenQuanYi Zen Hei"/>
-                <a:ea typeface="WenQuanYi Zen Hei"/>
+                <a:latin typeface="PingFang TC"/>
+                <a:ea typeface="PingFang TC"/>
               </a:rPr>
               <a:t>G1 go/no-go</a:t>
             </a:r>
@@ -13229,8 +13229,8 @@
                 <a:solidFill>
                   <a:srgbClr val="262B33"/>
                 </a:solidFill>
-                <a:latin typeface="WenQuanYi Zen Hei"/>
-                <a:ea typeface="WenQuanYi Zen Hei"/>
+                <a:latin typeface="PingFang TC"/>
+                <a:ea typeface="PingFang TC"/>
               </a:rPr>
               <a:t>M12</a:t>
             </a:r>
@@ -13316,8 +13316,8 @@
                 <a:solidFill>
                   <a:srgbClr val="262B33"/>
                 </a:solidFill>
-                <a:latin typeface="WenQuanYi Zen Hei"/>
-                <a:ea typeface="WenQuanYi Zen Hei"/>
+                <a:latin typeface="PingFang TC"/>
+                <a:ea typeface="PingFang TC"/>
               </a:rPr>
               <a:t>整機原型</a:t>
             </a:r>
@@ -13403,8 +13403,8 @@
                 <a:solidFill>
                   <a:srgbClr val="262B33"/>
                 </a:solidFill>
-                <a:latin typeface="WenQuanYi Zen Hei"/>
-                <a:ea typeface="WenQuanYi Zen Hei"/>
+                <a:latin typeface="PingFang TC"/>
+                <a:ea typeface="PingFang TC"/>
               </a:rPr>
               <a:t>發電側絕對校準</a:t>
             </a:r>
@@ -13490,8 +13490,8 @@
                 <a:solidFill>
                   <a:srgbClr val="262B33"/>
                 </a:solidFill>
-                <a:latin typeface="WenQuanYi Zen Hei"/>
-                <a:ea typeface="WenQuanYi Zen Hei"/>
+                <a:latin typeface="PingFang TC"/>
+                <a:ea typeface="PingFang TC"/>
               </a:rPr>
               <a:t>計畫收尾/續期</a:t>
             </a:r>
@@ -13533,8 +13533,8 @@
                 <a:solidFill>
                   <a:srgbClr val="E76F51"/>
                 </a:solidFill>
-                <a:latin typeface="WenQuanYi Zen Hei"/>
-                <a:ea typeface="WenQuanYi Zen Hei"/>
+                <a:latin typeface="PingFang TC"/>
+                <a:ea typeface="PingFang TC"/>
               </a:rPr>
               <a:t>兩個 go/no-go 門（G0/G1）是去風險核心：沒過不放大投入。</a:t>
             </a:r>
@@ -13638,8 +13638,8 @@
                 <a:solidFill>
                   <a:srgbClr val="2A9D8F"/>
                 </a:solidFill>
-                <a:latin typeface="WenQuanYi Zen Hei"/>
-                <a:ea typeface="WenQuanYi Zen Hei"/>
+                <a:latin typeface="PingFang TC"/>
+                <a:ea typeface="PingFang TC"/>
               </a:rPr>
               <a:t>RESOURCES</a:t>
             </a:r>
@@ -13681,8 +13681,8 @@
                 <a:solidFill>
                   <a:srgbClr val="1F3A5F"/>
                 </a:solidFill>
-                <a:latin typeface="WenQuanYi Zen Hei"/>
-                <a:ea typeface="WenQuanYi Zen Hei"/>
+                <a:latin typeface="PingFang TC"/>
+                <a:ea typeface="PingFang TC"/>
               </a:rPr>
               <a:t>設備需求與取得管道</a:t>
             </a:r>
@@ -13768,8 +13768,8 @@
                 <a:solidFill>
                   <a:srgbClr val="5A6370"/>
                 </a:solidFill>
-                <a:latin typeface="WenQuanYi Zen Hei"/>
-                <a:ea typeface="WenQuanYi Zen Hei"/>
+                <a:latin typeface="PingFang TC"/>
+                <a:ea typeface="PingFang TC"/>
               </a:rPr>
               <a:t>21</a:t>
             </a:r>
@@ -13811,8 +13811,8 @@
                 <a:solidFill>
                   <a:srgbClr val="262B33"/>
                 </a:solidFill>
-                <a:latin typeface="WenQuanYi Zen Hei"/>
-                <a:ea typeface="WenQuanYi Zen Hei"/>
+                <a:latin typeface="PingFang TC"/>
+                <a:ea typeface="PingFang TC"/>
               </a:rPr>
               <a:t>●  自有/校內共儀：XRD、SEM、DSC、VSM/PPMS——多數材料系所具備，先盤點。</a:t>
             </a:r>
@@ -13831,8 +13831,8 @@
                 <a:solidFill>
                   <a:srgbClr val="262B33"/>
                 </a:solidFill>
-                <a:latin typeface="WenQuanYi Zen Hei"/>
-                <a:ea typeface="WenQuanYi Zen Hei"/>
+                <a:latin typeface="PingFang TC"/>
+                <a:ea typeface="PingFang TC"/>
               </a:rPr>
               <a:t>●  合成：電弧熔煉爐 + 退火爐（Fe 系自製）；一階相委外或合作。</a:t>
             </a:r>
@@ -13851,8 +13851,8 @@
                 <a:solidFill>
                   <a:srgbClr val="262B33"/>
                 </a:solidFill>
-                <a:latin typeface="WenQuanYi Zen Hei"/>
-                <a:ea typeface="WenQuanYi Zen Hei"/>
+                <a:latin typeface="PingFang TC"/>
+                <a:ea typeface="PingFang TC"/>
               </a:rPr>
               <a:t>●  氫化：H2 氣氛爐（La-Fe-Si-H），需安全規範——可委外。</a:t>
             </a:r>
@@ -13871,8 +13871,8 @@
                 <a:solidFill>
                   <a:srgbClr val="262B33"/>
                 </a:solidFill>
-                <a:latin typeface="WenQuanYi Zen Hei"/>
-                <a:ea typeface="WenQuanYi Zen Hei"/>
+                <a:latin typeface="PingFang TC"/>
+                <a:ea typeface="PingFang TC"/>
               </a:rPr>
               <a:t>●  整機台：自製（磁路 + 換熱 + 線圈 + 量測），工程量大，Phase 3 才投入。</a:t>
             </a:r>
@@ -13891,8 +13891,8 @@
                 <a:solidFill>
                   <a:srgbClr val="2A9D8F"/>
                 </a:solidFill>
-                <a:latin typeface="WenQuanYi Zen Hei"/>
-                <a:ea typeface="WenQuanYi Zen Hei"/>
+                <a:latin typeface="PingFang TC"/>
+                <a:ea typeface="PingFang TC"/>
               </a:rPr>
               <a:t>●  策略：先用共儀與委外把固定成本壓到最低，驗證可行再考慮自建。</a:t>
             </a:r>
@@ -13996,8 +13996,8 @@
                 <a:solidFill>
                   <a:srgbClr val="2A9D8F"/>
                 </a:solidFill>
-                <a:latin typeface="WenQuanYi Zen Hei"/>
-                <a:ea typeface="WenQuanYi Zen Hei"/>
+                <a:latin typeface="PingFang TC"/>
+                <a:ea typeface="PingFang TC"/>
               </a:rPr>
               <a:t>BUDGET</a:t>
             </a:r>
@@ -14039,8 +14039,8 @@
                 <a:solidFill>
                   <a:srgbClr val="1F3A5F"/>
                 </a:solidFill>
-                <a:latin typeface="WenQuanYi Zen Hei"/>
-                <a:ea typeface="WenQuanYi Zen Hei"/>
+                <a:latin typeface="PingFang TC"/>
+                <a:ea typeface="PingFang TC"/>
               </a:rPr>
               <a:t>預算 / 資源粗估（相對量級）</a:t>
             </a:r>
@@ -14126,8 +14126,8 @@
                 <a:solidFill>
                   <a:srgbClr val="5A6370"/>
                 </a:solidFill>
-                <a:latin typeface="WenQuanYi Zen Hei"/>
-                <a:ea typeface="WenQuanYi Zen Hei"/>
+                <a:latin typeface="PingFang TC"/>
+                <a:ea typeface="PingFang TC"/>
               </a:rPr>
               <a:t>22</a:t>
             </a:r>
@@ -14213,8 +14213,8 @@
                 <a:solidFill>
                   <a:srgbClr val="FFFFFF"/>
                 </a:solidFill>
-                <a:latin typeface="WenQuanYi Zen Hei"/>
-                <a:ea typeface="WenQuanYi Zen Hei"/>
+                <a:latin typeface="PingFang TC"/>
+                <a:ea typeface="PingFang TC"/>
               </a:rPr>
               <a:t>階段</a:t>
             </a:r>
@@ -14300,8 +14300,8 @@
                 <a:solidFill>
                   <a:srgbClr val="FFFFFF"/>
                 </a:solidFill>
-                <a:latin typeface="WenQuanYi Zen Hei"/>
-                <a:ea typeface="WenQuanYi Zen Hei"/>
+                <a:latin typeface="PingFang TC"/>
+                <a:ea typeface="PingFang TC"/>
               </a:rPr>
               <a:t>樣品/合成</a:t>
             </a:r>
@@ -14387,8 +14387,8 @@
                 <a:solidFill>
                   <a:srgbClr val="FFFFFF"/>
                 </a:solidFill>
-                <a:latin typeface="WenQuanYi Zen Hei"/>
-                <a:ea typeface="WenQuanYi Zen Hei"/>
+                <a:latin typeface="PingFang TC"/>
+                <a:ea typeface="PingFang TC"/>
               </a:rPr>
               <a:t>量測（共儀/委外）</a:t>
             </a:r>
@@ -14474,8 +14474,8 @@
                 <a:solidFill>
                   <a:srgbClr val="FFFFFF"/>
                 </a:solidFill>
-                <a:latin typeface="WenQuanYi Zen Hei"/>
-                <a:ea typeface="WenQuanYi Zen Hei"/>
+                <a:latin typeface="PingFang TC"/>
+                <a:ea typeface="PingFang TC"/>
               </a:rPr>
               <a:t>相對量級</a:t>
             </a:r>
@@ -14561,8 +14561,8 @@
                 <a:solidFill>
                   <a:srgbClr val="262B33"/>
                 </a:solidFill>
-                <a:latin typeface="WenQuanYi Zen Hei"/>
-                <a:ea typeface="WenQuanYi Zen Hei"/>
+                <a:latin typeface="PingFang TC"/>
+                <a:ea typeface="PingFang TC"/>
               </a:rPr>
               <a:t>Phase 0</a:t>
             </a:r>
@@ -14648,8 +14648,8 @@
                 <a:solidFill>
                   <a:srgbClr val="262B33"/>
                 </a:solidFill>
-                <a:latin typeface="WenQuanYi Zen Hei"/>
-                <a:ea typeface="WenQuanYi Zen Hei"/>
+                <a:latin typeface="PingFang TC"/>
+                <a:ea typeface="PingFang TC"/>
               </a:rPr>
               <a:t>商購 Gd（低）</a:t>
             </a:r>
@@ -14735,8 +14735,8 @@
                 <a:solidFill>
                   <a:srgbClr val="262B33"/>
                 </a:solidFill>
-                <a:latin typeface="WenQuanYi Zen Hei"/>
-                <a:ea typeface="WenQuanYi Zen Hei"/>
+                <a:latin typeface="PingFang TC"/>
+                <a:ea typeface="PingFang TC"/>
               </a:rPr>
               <a:t>VSM+DSC（低）</a:t>
             </a:r>
@@ -14822,8 +14822,8 @@
                 <a:solidFill>
                   <a:srgbClr val="262B33"/>
                 </a:solidFill>
-                <a:latin typeface="WenQuanYi Zen Hei"/>
-                <a:ea typeface="WenQuanYi Zen Hei"/>
+                <a:latin typeface="PingFang TC"/>
+                <a:ea typeface="PingFang TC"/>
               </a:rPr>
               <a:t>★ 最低</a:t>
             </a:r>
@@ -14909,8 +14909,8 @@
                 <a:solidFill>
                   <a:srgbClr val="262B33"/>
                 </a:solidFill>
-                <a:latin typeface="WenQuanYi Zen Hei"/>
-                <a:ea typeface="WenQuanYi Zen Hei"/>
+                <a:latin typeface="PingFang TC"/>
+                <a:ea typeface="PingFang TC"/>
               </a:rPr>
               <a:t>Phase 1</a:t>
             </a:r>
@@ -14996,8 +14996,8 @@
                 <a:solidFill>
                   <a:srgbClr val="262B33"/>
                 </a:solidFill>
-                <a:latin typeface="WenQuanYi Zen Hei"/>
-                <a:ea typeface="WenQuanYi Zen Hei"/>
+                <a:latin typeface="PingFang TC"/>
+                <a:ea typeface="PingFang TC"/>
               </a:rPr>
               <a:t>委外一階（中）</a:t>
             </a:r>
@@ -15083,8 +15083,8 @@
                 <a:solidFill>
                   <a:srgbClr val="262B33"/>
                 </a:solidFill>
-                <a:latin typeface="WenQuanYi Zen Hei"/>
-                <a:ea typeface="WenQuanYi Zen Hei"/>
+                <a:latin typeface="PingFang TC"/>
+                <a:ea typeface="PingFang TC"/>
               </a:rPr>
               <a:t>VSM+DSC+氫化（中）</a:t>
             </a:r>
@@ -15170,8 +15170,8 @@
                 <a:solidFill>
                   <a:srgbClr val="262B33"/>
                 </a:solidFill>
-                <a:latin typeface="WenQuanYi Zen Hei"/>
-                <a:ea typeface="WenQuanYi Zen Hei"/>
+                <a:latin typeface="PingFang TC"/>
+                <a:ea typeface="PingFang TC"/>
               </a:rPr>
               <a:t>★★</a:t>
             </a:r>
@@ -15257,8 +15257,8 @@
                 <a:solidFill>
                   <a:srgbClr val="262B33"/>
                 </a:solidFill>
-                <a:latin typeface="WenQuanYi Zen Hei"/>
-                <a:ea typeface="WenQuanYi Zen Hei"/>
+                <a:latin typeface="PingFang TC"/>
+                <a:ea typeface="PingFang TC"/>
               </a:rPr>
               <a:t>Phase 2</a:t>
             </a:r>
@@ -15344,8 +15344,8 @@
                 <a:solidFill>
                   <a:srgbClr val="262B33"/>
                 </a:solidFill>
-                <a:latin typeface="WenQuanYi Zen Hei"/>
-                <a:ea typeface="WenQuanYi Zen Hei"/>
+                <a:latin typeface="PingFang TC"/>
+                <a:ea typeface="PingFang TC"/>
               </a:rPr>
               <a:t>自製+複合（中）</a:t>
             </a:r>
@@ -15431,8 +15431,8 @@
                 <a:solidFill>
                   <a:srgbClr val="262B33"/>
                 </a:solidFill>
-                <a:latin typeface="WenQuanYi Zen Hei"/>
-                <a:ea typeface="WenQuanYi Zen Hei"/>
+                <a:latin typeface="PingFang TC"/>
+                <a:ea typeface="PingFang TC"/>
               </a:rPr>
               <a:t>+SEM+κ（中）</a:t>
             </a:r>
@@ -15518,8 +15518,8 @@
                 <a:solidFill>
                   <a:srgbClr val="262B33"/>
                 </a:solidFill>
-                <a:latin typeface="WenQuanYi Zen Hei"/>
-                <a:ea typeface="WenQuanYi Zen Hei"/>
+                <a:latin typeface="PingFang TC"/>
+                <a:ea typeface="PingFang TC"/>
               </a:rPr>
               <a:t>★★★</a:t>
             </a:r>
@@ -15605,8 +15605,8 @@
                 <a:solidFill>
                   <a:srgbClr val="262B33"/>
                 </a:solidFill>
-                <a:latin typeface="WenQuanYi Zen Hei"/>
-                <a:ea typeface="WenQuanYi Zen Hei"/>
+                <a:latin typeface="PingFang TC"/>
+                <a:ea typeface="PingFang TC"/>
               </a:rPr>
               <a:t>Phase 3</a:t>
             </a:r>
@@ -15692,8 +15692,8 @@
                 <a:solidFill>
                   <a:srgbClr val="262B33"/>
                 </a:solidFill>
-                <a:latin typeface="WenQuanYi Zen Hei"/>
-                <a:ea typeface="WenQuanYi Zen Hei"/>
+                <a:latin typeface="PingFang TC"/>
+                <a:ea typeface="PingFang TC"/>
               </a:rPr>
               <a:t>原型製作（高）</a:t>
             </a:r>
@@ -15779,8 +15779,8 @@
                 <a:solidFill>
                   <a:srgbClr val="262B33"/>
                 </a:solidFill>
-                <a:latin typeface="WenQuanYi Zen Hei"/>
-                <a:ea typeface="WenQuanYi Zen Hei"/>
+                <a:latin typeface="PingFang TC"/>
+                <a:ea typeface="PingFang TC"/>
               </a:rPr>
               <a:t>整機量測（高）</a:t>
             </a:r>
@@ -15866,8 +15866,8 @@
                 <a:solidFill>
                   <a:srgbClr val="262B33"/>
                 </a:solidFill>
-                <a:latin typeface="WenQuanYi Zen Hei"/>
-                <a:ea typeface="WenQuanYi Zen Hei"/>
+                <a:latin typeface="PingFang TC"/>
+                <a:ea typeface="PingFang TC"/>
               </a:rPr>
               <a:t>★★★★</a:t>
             </a:r>
@@ -15909,8 +15909,8 @@
                 <a:solidFill>
                   <a:srgbClr val="5A6370"/>
                 </a:solidFill>
-                <a:latin typeface="WenQuanYi Zen Hei"/>
-                <a:ea typeface="WenQuanYi Zen Hei"/>
+                <a:latin typeface="PingFang TC"/>
+                <a:ea typeface="PingFang TC"/>
               </a:rPr>
               <a:t>精確數字依在地共儀/委外報價而定；本表為相對量級，供排序與分期申請經費。</a:t>
             </a:r>
@@ -16014,8 +16014,8 @@
                 <a:solidFill>
                   <a:srgbClr val="2A9D8F"/>
                 </a:solidFill>
-                <a:latin typeface="WenQuanYi Zen Hei"/>
-                <a:ea typeface="WenQuanYi Zen Hei"/>
+                <a:latin typeface="PingFang TC"/>
+                <a:ea typeface="PingFang TC"/>
               </a:rPr>
               <a:t>RISK</a:t>
             </a:r>
@@ -16057,8 +16057,8 @@
                 <a:solidFill>
                   <a:srgbClr val="1F3A5F"/>
                 </a:solidFill>
-                <a:latin typeface="WenQuanYi Zen Hei"/>
-                <a:ea typeface="WenQuanYi Zen Hei"/>
+                <a:latin typeface="PingFang TC"/>
+                <a:ea typeface="PingFang TC"/>
               </a:rPr>
               <a:t>風險登錄與緩解（避免重蹈覆轍）</a:t>
             </a:r>
@@ -16144,8 +16144,8 @@
                 <a:solidFill>
                   <a:srgbClr val="5A6370"/>
                 </a:solidFill>
-                <a:latin typeface="WenQuanYi Zen Hei"/>
-                <a:ea typeface="WenQuanYi Zen Hei"/>
+                <a:latin typeface="PingFang TC"/>
+                <a:ea typeface="PingFang TC"/>
               </a:rPr>
               <a:t>23</a:t>
             </a:r>
@@ -16231,8 +16231,8 @@
                 <a:solidFill>
                   <a:srgbClr val="FFFFFF"/>
                 </a:solidFill>
-                <a:latin typeface="WenQuanYi Zen Hei"/>
-                <a:ea typeface="WenQuanYi Zen Hei"/>
+                <a:latin typeface="PingFang TC"/>
+                <a:ea typeface="PingFang TC"/>
               </a:rPr>
               <a:t>風險</a:t>
             </a:r>
@@ -16318,8 +16318,8 @@
                 <a:solidFill>
                   <a:srgbClr val="FFFFFF"/>
                 </a:solidFill>
-                <a:latin typeface="WenQuanYi Zen Hei"/>
-                <a:ea typeface="WenQuanYi Zen Hei"/>
+                <a:latin typeface="PingFang TC"/>
+                <a:ea typeface="PingFang TC"/>
               </a:rPr>
               <a:t>影響</a:t>
             </a:r>
@@ -16405,8 +16405,8 @@
                 <a:solidFill>
                   <a:srgbClr val="FFFFFF"/>
                 </a:solidFill>
-                <a:latin typeface="WenQuanYi Zen Hei"/>
-                <a:ea typeface="WenQuanYi Zen Hei"/>
+                <a:latin typeface="PingFang TC"/>
+                <a:ea typeface="PingFang TC"/>
               </a:rPr>
               <a:t>緩解</a:t>
             </a:r>
@@ -16492,8 +16492,8 @@
                 <a:solidFill>
                   <a:srgbClr val="262B33"/>
                 </a:solidFill>
-                <a:latin typeface="WenQuanYi Zen Hei"/>
-                <a:ea typeface="WenQuanYi Zen Hei"/>
+                <a:latin typeface="PingFang TC"/>
+                <a:ea typeface="PingFang TC"/>
               </a:rPr>
               <a:t>一階相未正確形成</a:t>
             </a:r>
@@ -16579,8 +16579,8 @@
                 <a:solidFill>
                   <a:srgbClr val="262B33"/>
                 </a:solidFill>
-                <a:latin typeface="WenQuanYi Zen Hei"/>
-                <a:ea typeface="WenQuanYi Zen Hei"/>
+                <a:latin typeface="PingFang TC"/>
+                <a:ea typeface="PingFang TC"/>
               </a:rPr>
               <a:t>量到的不是目標相</a:t>
             </a:r>
@@ -16666,8 +16666,8 @@
                 <a:solidFill>
                   <a:srgbClr val="262B33"/>
                 </a:solidFill>
-                <a:latin typeface="WenQuanYi Zen Hei"/>
-                <a:ea typeface="WenQuanYi Zen Hei"/>
+                <a:latin typeface="PingFang TC"/>
+                <a:ea typeface="PingFang TC"/>
               </a:rPr>
               <a:t>委外/合作 + XRD 先確認相</a:t>
             </a:r>
@@ -16753,8 +16753,8 @@
                 <a:solidFill>
                   <a:srgbClr val="262B33"/>
                 </a:solidFill>
-                <a:latin typeface="WenQuanYi Zen Hei"/>
-                <a:ea typeface="WenQuanYi Zen Hei"/>
+                <a:latin typeface="PingFang TC"/>
+                <a:ea typeface="PingFang TC"/>
               </a:rPr>
               <a:t>稀土氧化/氫脆</a:t>
             </a:r>
@@ -16840,8 +16840,8 @@
                 <a:solidFill>
                   <a:srgbClr val="262B33"/>
                 </a:solidFill>
-                <a:latin typeface="WenQuanYi Zen Hei"/>
-                <a:ea typeface="WenQuanYi Zen Hei"/>
+                <a:latin typeface="PingFang TC"/>
+                <a:ea typeface="PingFang TC"/>
               </a:rPr>
               <a:t>樣品劣化、數據失真</a:t>
             </a:r>
@@ -16927,8 +16927,8 @@
                 <a:solidFill>
                   <a:srgbClr val="262B33"/>
                 </a:solidFill>
-                <a:latin typeface="WenQuanYi Zen Hei"/>
-                <a:ea typeface="WenQuanYi Zen Hei"/>
+                <a:latin typeface="PingFang TC"/>
+                <a:ea typeface="PingFang TC"/>
               </a:rPr>
               <a:t>惰性氣氛、鍍層、儘速量測</a:t>
             </a:r>
@@ -17014,8 +17014,8 @@
                 <a:solidFill>
                   <a:srgbClr val="262B33"/>
                 </a:solidFill>
-                <a:latin typeface="WenQuanYi Zen Hei"/>
-                <a:ea typeface="WenQuanYi Zen Hei"/>
+                <a:latin typeface="PingFang TC"/>
+                <a:ea typeface="PingFang TC"/>
               </a:rPr>
               <a:t>量測未校準</a:t>
             </a:r>
@@ -17101,8 +17101,8 @@
                 <a:solidFill>
                   <a:srgbClr val="262B33"/>
                 </a:solidFill>
-                <a:latin typeface="WenQuanYi Zen Hei"/>
-                <a:ea typeface="WenQuanYi Zen Hei"/>
+                <a:latin typeface="PingFang TC"/>
+                <a:ea typeface="PingFang TC"/>
               </a:rPr>
               <a:t>絕對值不可信</a:t>
             </a:r>
@@ -17188,8 +17188,8 @@
                 <a:solidFill>
                   <a:srgbClr val="262B33"/>
                 </a:solidFill>
-                <a:latin typeface="WenQuanYi Zen Hei"/>
-                <a:ea typeface="WenQuanYi Zen Hei"/>
+                <a:latin typeface="PingFang TC"/>
+                <a:ea typeface="PingFang TC"/>
               </a:rPr>
               <a:t>Phase 0 用 Gd 先校準儀器</a:t>
             </a:r>
@@ -17275,8 +17275,8 @@
                 <a:solidFill>
                   <a:srgbClr val="262B33"/>
                 </a:solidFill>
-                <a:latin typeface="WenQuanYi Zen Hei"/>
-                <a:ea typeface="WenQuanYi Zen Hei"/>
+                <a:latin typeface="PingFang TC"/>
+                <a:ea typeface="PingFang TC"/>
               </a:rPr>
               <a:t>範圍蔓延</a:t>
             </a:r>
@@ -17362,8 +17362,8 @@
                 <a:solidFill>
                   <a:srgbClr val="262B33"/>
                 </a:solidFill>
-                <a:latin typeface="WenQuanYi Zen Hei"/>
-                <a:ea typeface="WenQuanYi Zen Hei"/>
+                <a:latin typeface="PingFang TC"/>
+                <a:ea typeface="PingFang TC"/>
               </a:rPr>
               <a:t>成本失控</a:t>
             </a:r>
@@ -17449,8 +17449,8 @@
                 <a:solidFill>
                   <a:srgbClr val="262B33"/>
                 </a:solidFill>
-                <a:latin typeface="WenQuanYi Zen Hei"/>
-                <a:ea typeface="WenQuanYi Zen Hei"/>
+                <a:latin typeface="PingFang TC"/>
+                <a:ea typeface="PingFang TC"/>
               </a:rPr>
               <a:t>決策門閘控、分期投入</a:t>
             </a:r>
@@ -17536,8 +17536,8 @@
                 <a:solidFill>
                   <a:srgbClr val="262B33"/>
                 </a:solidFill>
-                <a:latin typeface="WenQuanYi Zen Hei"/>
-                <a:ea typeface="WenQuanYi Zen Hei"/>
+                <a:latin typeface="PingFang TC"/>
+                <a:ea typeface="PingFang TC"/>
               </a:rPr>
               <a:t>GA 候選不可製造</a:t>
             </a:r>
@@ -17623,8 +17623,8 @@
                 <a:solidFill>
                   <a:srgbClr val="262B33"/>
                 </a:solidFill>
-                <a:latin typeface="WenQuanYi Zen Hei"/>
-                <a:ea typeface="WenQuanYi Zen Hei"/>
+                <a:latin typeface="PingFang TC"/>
+                <a:ea typeface="PingFang TC"/>
               </a:rPr>
               <a:t>白做樣品</a:t>
             </a:r>
@@ -17710,8 +17710,8 @@
                 <a:solidFill>
                   <a:srgbClr val="262B33"/>
                 </a:solidFill>
-                <a:latin typeface="WenQuanYi Zen Hei"/>
-                <a:ea typeface="WenQuanYi Zen Hei"/>
+                <a:latin typeface="PingFang TC"/>
+                <a:ea typeface="PingFang TC"/>
               </a:rPr>
               <a:t>先過 D9 脆性/可製造性篩選</a:t>
             </a:r>
@@ -17815,8 +17815,8 @@
                 <a:solidFill>
                   <a:srgbClr val="2A9D8F"/>
                 </a:solidFill>
-                <a:latin typeface="WenQuanYi Zen Hei"/>
-                <a:ea typeface="WenQuanYi Zen Hei"/>
+                <a:latin typeface="PingFang TC"/>
+                <a:ea typeface="PingFang TC"/>
               </a:rPr>
               <a:t>SCALE-UP</a:t>
             </a:r>
@@ -17858,8 +17858,8 @@
                 <a:solidFill>
                   <a:srgbClr val="1F3A5F"/>
                 </a:solidFill>
-                <a:latin typeface="WenQuanYi Zen Hei"/>
-                <a:ea typeface="WenQuanYi Zen Hei"/>
+                <a:latin typeface="PingFang TC"/>
+                <a:ea typeface="PingFang TC"/>
               </a:rPr>
               <a:t>規模化路徑：先小後大</a:t>
             </a:r>
@@ -17945,8 +17945,8 @@
                 <a:solidFill>
                   <a:srgbClr val="5A6370"/>
                 </a:solidFill>
-                <a:latin typeface="WenQuanYi Zen Hei"/>
-                <a:ea typeface="WenQuanYi Zen Hei"/>
+                <a:latin typeface="PingFang TC"/>
+                <a:ea typeface="PingFang TC"/>
               </a:rPr>
               <a:t>24</a:t>
             </a:r>
@@ -18012,8 +18012,8 @@
                 <a:solidFill>
                   <a:srgbClr val="262B33"/>
                 </a:solidFill>
-                <a:latin typeface="WenQuanYi Zen Hei"/>
-                <a:ea typeface="WenQuanYi Zen Hei"/>
+                <a:latin typeface="PingFang TC"/>
+                <a:ea typeface="PingFang TC"/>
               </a:rPr>
               <a:t>●  Phase 0：1 樣驗流程。</a:t>
             </a:r>
@@ -18032,8 +18032,8 @@
                 <a:solidFill>
                   <a:srgbClr val="262B33"/>
                 </a:solidFill>
-                <a:latin typeface="WenQuanYi Zen Hei"/>
-                <a:ea typeface="WenQuanYi Zen Hei"/>
+                <a:latin typeface="PingFang TC"/>
+                <a:ea typeface="PingFang TC"/>
               </a:rPr>
               <a:t>●  Phase 1：3 樣一階。</a:t>
             </a:r>
@@ -18052,8 +18052,8 @@
                 <a:solidFill>
                   <a:srgbClr val="262B33"/>
                 </a:solidFill>
-                <a:latin typeface="WenQuanYi Zen Hei"/>
-                <a:ea typeface="WenQuanYi Zen Hei"/>
+                <a:latin typeface="PingFang TC"/>
+                <a:ea typeface="PingFang TC"/>
               </a:rPr>
               <a:t>●  Phase 2：6 樣 GA+複合。</a:t>
             </a:r>
@@ -18072,8 +18072,8 @@
                 <a:solidFill>
                   <a:srgbClr val="262B33"/>
                 </a:solidFill>
-                <a:latin typeface="WenQuanYi Zen Hei"/>
-                <a:ea typeface="WenQuanYi Zen Hei"/>
+                <a:latin typeface="PingFang TC"/>
+                <a:ea typeface="PingFang TC"/>
               </a:rPr>
               <a:t>●  Phase 3：原型。</a:t>
             </a:r>
@@ -18092,8 +18092,8 @@
                 <a:solidFill>
                   <a:srgbClr val="2A9D8F"/>
                 </a:solidFill>
-                <a:latin typeface="WenQuanYi Zen Hei"/>
-                <a:ea typeface="WenQuanYi Zen Hei"/>
+                <a:latin typeface="PingFang TC"/>
+                <a:ea typeface="PingFang TC"/>
               </a:rPr>
               <a:t>●  投入隨『已驗證的把握』遞增。</a:t>
             </a:r>
@@ -18197,8 +18197,8 @@
                 <a:solidFill>
                   <a:srgbClr val="2A9D8F"/>
                 </a:solidFill>
-                <a:latin typeface="WenQuanYi Zen Hei"/>
-                <a:ea typeface="WenQuanYi Zen Hei"/>
+                <a:latin typeface="PingFang TC"/>
+                <a:ea typeface="PingFang TC"/>
               </a:rPr>
               <a:t>TEAM</a:t>
             </a:r>
@@ -18240,8 +18240,8 @@
                 <a:solidFill>
                   <a:srgbClr val="1F3A5F"/>
                 </a:solidFill>
-                <a:latin typeface="WenQuanYi Zen Hei"/>
-                <a:ea typeface="WenQuanYi Zen Hei"/>
+                <a:latin typeface="PingFang TC"/>
+                <a:ea typeface="PingFang TC"/>
               </a:rPr>
               <a:t>團隊與角色（最小編制）</a:t>
             </a:r>
@@ -18327,8 +18327,8 @@
                 <a:solidFill>
                   <a:srgbClr val="5A6370"/>
                 </a:solidFill>
-                <a:latin typeface="WenQuanYi Zen Hei"/>
-                <a:ea typeface="WenQuanYi Zen Hei"/>
+                <a:latin typeface="PingFang TC"/>
+                <a:ea typeface="PingFang TC"/>
               </a:rPr>
               <a:t>25</a:t>
             </a:r>
@@ -18414,8 +18414,8 @@
                 <a:solidFill>
                   <a:srgbClr val="FFFFFF"/>
                 </a:solidFill>
-                <a:latin typeface="WenQuanYi Zen Hei"/>
-                <a:ea typeface="WenQuanYi Zen Hei"/>
+                <a:latin typeface="PingFang TC"/>
+                <a:ea typeface="PingFang TC"/>
               </a:rPr>
               <a:t>角色</a:t>
             </a:r>
@@ -18501,8 +18501,8 @@
                 <a:solidFill>
                   <a:srgbClr val="FFFFFF"/>
                 </a:solidFill>
-                <a:latin typeface="WenQuanYi Zen Hei"/>
-                <a:ea typeface="WenQuanYi Zen Hei"/>
+                <a:latin typeface="PingFang TC"/>
+                <a:ea typeface="PingFang TC"/>
               </a:rPr>
               <a:t>職責</a:t>
             </a:r>
@@ -18588,8 +18588,8 @@
                 <a:solidFill>
                   <a:srgbClr val="FFFFFF"/>
                 </a:solidFill>
-                <a:latin typeface="WenQuanYi Zen Hei"/>
-                <a:ea typeface="WenQuanYi Zen Hei"/>
+                <a:latin typeface="PingFang TC"/>
+                <a:ea typeface="PingFang TC"/>
               </a:rPr>
               <a:t>階段</a:t>
             </a:r>
@@ -18675,8 +18675,8 @@
                 <a:solidFill>
                   <a:srgbClr val="262B33"/>
                 </a:solidFill>
-                <a:latin typeface="WenQuanYi Zen Hei"/>
-                <a:ea typeface="WenQuanYi Zen Hei"/>
+                <a:latin typeface="PingFang TC"/>
+                <a:ea typeface="PingFang TC"/>
               </a:rPr>
               <a:t>材料製備</a:t>
             </a:r>
@@ -18762,8 +18762,8 @@
                 <a:solidFill>
                   <a:srgbClr val="262B33"/>
                 </a:solidFill>
-                <a:latin typeface="WenQuanYi Zen Hei"/>
-                <a:ea typeface="WenQuanYi Zen Hei"/>
+                <a:latin typeface="PingFang TC"/>
+                <a:ea typeface="PingFang TC"/>
               </a:rPr>
               <a:t>合成/退火/委外協調</a:t>
             </a:r>
@@ -18849,8 +18849,8 @@
                 <a:solidFill>
                   <a:srgbClr val="262B33"/>
                 </a:solidFill>
-                <a:latin typeface="WenQuanYi Zen Hei"/>
-                <a:ea typeface="WenQuanYi Zen Hei"/>
+                <a:latin typeface="PingFang TC"/>
+                <a:ea typeface="PingFang TC"/>
               </a:rPr>
               <a:t>全程</a:t>
             </a:r>
@@ -18936,8 +18936,8 @@
                 <a:solidFill>
                   <a:srgbClr val="262B33"/>
                 </a:solidFill>
-                <a:latin typeface="WenQuanYi Zen Hei"/>
-                <a:ea typeface="WenQuanYi Zen Hei"/>
+                <a:latin typeface="PingFang TC"/>
+                <a:ea typeface="PingFang TC"/>
               </a:rPr>
               <a:t>磁/熱量測</a:t>
             </a:r>
@@ -19023,8 +19023,8 @@
                 <a:solidFill>
                   <a:srgbClr val="262B33"/>
                 </a:solidFill>
-                <a:latin typeface="WenQuanYi Zen Hei"/>
-                <a:ea typeface="WenQuanYi Zen Hei"/>
+                <a:latin typeface="PingFang TC"/>
+                <a:ea typeface="PingFang TC"/>
               </a:rPr>
               <a:t>VSM/DSC/κ + 數據</a:t>
             </a:r>
@@ -19110,8 +19110,8 @@
                 <a:solidFill>
                   <a:srgbClr val="262B33"/>
                 </a:solidFill>
-                <a:latin typeface="WenQuanYi Zen Hei"/>
-                <a:ea typeface="WenQuanYi Zen Hei"/>
+                <a:latin typeface="PingFang TC"/>
+                <a:ea typeface="PingFang TC"/>
               </a:rPr>
               <a:t>全程</a:t>
             </a:r>
@@ -19197,8 +19197,8 @@
                 <a:solidFill>
                   <a:srgbClr val="262B33"/>
                 </a:solidFill>
-                <a:latin typeface="WenQuanYi Zen Hei"/>
-                <a:ea typeface="WenQuanYi Zen Hei"/>
+                <a:latin typeface="PingFang TC"/>
+                <a:ea typeface="PingFang TC"/>
               </a:rPr>
               <a:t>建模回填</a:t>
             </a:r>
@@ -19284,8 +19284,8 @@
                 <a:solidFill>
                   <a:srgbClr val="262B33"/>
                 </a:solidFill>
-                <a:latin typeface="WenQuanYi Zen Hei"/>
-                <a:ea typeface="WenQuanYi Zen Hei"/>
+                <a:latin typeface="PingFang TC"/>
+                <a:ea typeface="PingFang TC"/>
               </a:rPr>
               <a:t>實測→模型校準→復現</a:t>
             </a:r>
@@ -19371,8 +19371,8 @@
                 <a:solidFill>
                   <a:srgbClr val="262B33"/>
                 </a:solidFill>
-                <a:latin typeface="WenQuanYi Zen Hei"/>
-                <a:ea typeface="WenQuanYi Zen Hei"/>
+                <a:latin typeface="PingFang TC"/>
+                <a:ea typeface="PingFang TC"/>
               </a:rPr>
               <a:t>全程</a:t>
             </a:r>
@@ -19458,8 +19458,8 @@
                 <a:solidFill>
                   <a:srgbClr val="262B33"/>
                 </a:solidFill>
-                <a:latin typeface="WenQuanYi Zen Hei"/>
-                <a:ea typeface="WenQuanYi Zen Hei"/>
+                <a:latin typeface="PingFang TC"/>
+                <a:ea typeface="PingFang TC"/>
               </a:rPr>
               <a:t>整機工程</a:t>
             </a:r>
@@ -19545,8 +19545,8 @@
                 <a:solidFill>
                   <a:srgbClr val="262B33"/>
                 </a:solidFill>
-                <a:latin typeface="WenQuanYi Zen Hei"/>
-                <a:ea typeface="WenQuanYi Zen Hei"/>
+                <a:latin typeface="PingFang TC"/>
+                <a:ea typeface="PingFang TC"/>
               </a:rPr>
               <a:t>原型設計與量測</a:t>
             </a:r>
@@ -19632,8 +19632,8 @@
                 <a:solidFill>
                   <a:srgbClr val="262B33"/>
                 </a:solidFill>
-                <a:latin typeface="WenQuanYi Zen Hei"/>
-                <a:ea typeface="WenQuanYi Zen Hei"/>
+                <a:latin typeface="PingFang TC"/>
+                <a:ea typeface="PingFang TC"/>
               </a:rPr>
               <a:t>Phase 3</a:t>
             </a:r>
@@ -19675,8 +19675,8 @@
                 <a:solidFill>
                   <a:srgbClr val="5A6370"/>
                 </a:solidFill>
-                <a:latin typeface="WenQuanYi Zen Hei"/>
-                <a:ea typeface="WenQuanYi Zen Hei"/>
+                <a:latin typeface="PingFang TC"/>
+                <a:ea typeface="PingFang TC"/>
               </a:rPr>
               <a:t>可由 2–3 人 + 共儀起步；建模回填角色與既有 alloy_engine 腳本直接銜接。</a:t>
             </a:r>
@@ -19780,8 +19780,8 @@
                 <a:solidFill>
                   <a:srgbClr val="2A9D8F"/>
                 </a:solidFill>
-                <a:latin typeface="WenQuanYi Zen Hei"/>
-                <a:ea typeface="WenQuanYi Zen Hei"/>
+                <a:latin typeface="PingFang TC"/>
+                <a:ea typeface="PingFang TC"/>
               </a:rPr>
               <a:t>DELIVERABLES</a:t>
             </a:r>
@@ -19823,8 +19823,8 @@
                 <a:solidFill>
                   <a:srgbClr val="1F3A5F"/>
                 </a:solidFill>
-                <a:latin typeface="WenQuanYi Zen Hei"/>
-                <a:ea typeface="WenQuanYi Zen Hei"/>
+                <a:latin typeface="PingFang TC"/>
+                <a:ea typeface="PingFang TC"/>
               </a:rPr>
               <a:t>交付物與下一步</a:t>
             </a:r>
@@ -19910,8 +19910,8 @@
                 <a:solidFill>
                   <a:srgbClr val="5A6370"/>
                 </a:solidFill>
-                <a:latin typeface="WenQuanYi Zen Hei"/>
-                <a:ea typeface="WenQuanYi Zen Hei"/>
+                <a:latin typeface="PingFang TC"/>
+                <a:ea typeface="PingFang TC"/>
               </a:rPr>
               <a:t>26</a:t>
             </a:r>
@@ -19953,8 +19953,8 @@
                 <a:solidFill>
                   <a:srgbClr val="262B33"/>
                 </a:solidFill>
-                <a:latin typeface="WenQuanYi Zen Hei"/>
-                <a:ea typeface="WenQuanYi Zen Hei"/>
+                <a:latin typeface="PingFang TC"/>
+                <a:ea typeface="PingFang TC"/>
               </a:rPr>
               <a:t>●  每階段：量測原始數據 + 回填後的模型參數 + 復現腳本（入 git）。</a:t>
             </a:r>
@@ -19973,8 +19973,8 @@
                 <a:solidFill>
                   <a:srgbClr val="262B33"/>
                 </a:solidFill>
-                <a:latin typeface="WenQuanYi Zen Hei"/>
-                <a:ea typeface="WenQuanYi Zen Hei"/>
+                <a:latin typeface="PingFang TC"/>
+                <a:ea typeface="PingFang TC"/>
               </a:rPr>
               <a:t>●  先導報告（Phase 0）：Gd 流程驗證 + G0 決策建議。</a:t>
             </a:r>
@@ -19993,8 +19993,8 @@
                 <a:solidFill>
                   <a:srgbClr val="262B33"/>
                 </a:solidFill>
-                <a:latin typeface="WenQuanYi Zen Hei"/>
-                <a:ea typeface="WenQuanYi Zen Hei"/>
+                <a:latin typeface="PingFang TC"/>
+                <a:ea typeface="PingFang TC"/>
               </a:rPr>
               <a:t>●  校準後模型：reference_materials / composite / device 的實測版。</a:t>
             </a:r>
@@ -20013,8 +20013,8 @@
                 <a:solidFill>
                   <a:srgbClr val="262B33"/>
                 </a:solidFill>
-                <a:latin typeface="WenQuanYi Zen Hei"/>
-                <a:ea typeface="WenQuanYi Zen Hei"/>
+                <a:latin typeface="PingFang TC"/>
+                <a:ea typeface="PingFang TC"/>
               </a:rPr>
               <a:t>●  最終：整機原型對標報告，收斂發電側絕對校準。</a:t>
             </a:r>
@@ -20033,8 +20033,8 @@
                 <a:solidFill>
                   <a:srgbClr val="1F3A5F"/>
                 </a:solidFill>
-                <a:latin typeface="WenQuanYi Zen Hei"/>
-                <a:ea typeface="WenQuanYi Zen Hei"/>
+                <a:latin typeface="PingFang TC"/>
+                <a:ea typeface="PingFang TC"/>
               </a:rPr>
               <a:t>●  立即下一步：① 盤點可用共儀 ② 採購純 Gd ③ 跑 run_search 產 GA 候選清單。</a:t>
             </a:r>
@@ -20182,8 +20182,8 @@
                 <a:solidFill>
                   <a:srgbClr val="FFFFFF"/>
                 </a:solidFill>
-                <a:latin typeface="WenQuanYi Zen Hei"/>
-                <a:ea typeface="WenQuanYi Zen Hei"/>
+                <a:latin typeface="PingFang TC"/>
+                <a:ea typeface="PingFang TC"/>
               </a:rPr>
               <a:t>先導去風險，分期擴張</a:t>
             </a:r>
@@ -20202,8 +20202,8 @@
                 <a:solidFill>
                   <a:srgbClr val="F2F4F7"/>
                 </a:solidFill>
-                <a:latin typeface="WenQuanYi Zen Hei"/>
-                <a:ea typeface="WenQuanYi Zen Hei"/>
+                <a:latin typeface="PingFang TC"/>
+                <a:ea typeface="PingFang TC"/>
               </a:rPr>
               <a:t>用最小成本，把模型校成可信的設計工具</a:t>
             </a:r>
@@ -20242,8 +20242,8 @@
                 <a:solidFill>
                   <a:srgbClr val="F2F4F7"/>
                 </a:solidFill>
-                <a:latin typeface="WenQuanYi Zen Hei"/>
-                <a:ea typeface="WenQuanYi Zen Hei"/>
+                <a:latin typeface="PingFang TC"/>
+                <a:ea typeface="PingFang TC"/>
               </a:rPr>
               <a:t>●  Phase 0 純 Gd 打通流程 → G0 → 一階材料 → GA 候選/複合 → G1 → 整機原型。</a:t>
             </a:r>
@@ -20259,8 +20259,8 @@
                 <a:solidFill>
                   <a:srgbClr val="F2F4F7"/>
                 </a:solidFill>
-                <a:latin typeface="WenQuanYi Zen Hei"/>
-                <a:ea typeface="WenQuanYi Zen Hei"/>
+                <a:latin typeface="PingFang TC"/>
+                <a:ea typeface="PingFang TC"/>
               </a:rPr>
               <a:t>●  每一步都有可量測的決策門，沒過不放大投入——避免重蹈覆轍。</a:t>
             </a:r>
@@ -20276,8 +20276,8 @@
                 <a:solidFill>
                   <a:srgbClr val="F2F4F7"/>
                 </a:solidFill>
-                <a:latin typeface="WenQuanYi Zen Hei"/>
-                <a:ea typeface="WenQuanYi Zen Hei"/>
+                <a:latin typeface="PingFang TC"/>
+                <a:ea typeface="PingFang TC"/>
               </a:rPr>
               <a:t>●  量到什麼都對應回填模型哪裡，形成閉環校準。</a:t>
             </a:r>
@@ -20293,8 +20293,8 @@
                 <a:solidFill>
                   <a:srgbClr val="F2F4F7"/>
                 </a:solidFill>
-                <a:latin typeface="WenQuanYi Zen Hei"/>
-                <a:ea typeface="WenQuanYi Zen Hei"/>
+                <a:latin typeface="PingFang TC"/>
+                <a:ea typeface="PingFang TC"/>
               </a:rPr>
               <a:t>●  詳細需求、規格、時程、預算見隨附 Word 文件。</a:t>
             </a:r>
@@ -20398,8 +20398,8 @@
                 <a:solidFill>
                   <a:srgbClr val="2A9D8F"/>
                 </a:solidFill>
-                <a:latin typeface="WenQuanYi Zen Hei"/>
-                <a:ea typeface="WenQuanYi Zen Hei"/>
+                <a:latin typeface="PingFang TC"/>
+                <a:ea typeface="PingFang TC"/>
               </a:rPr>
               <a:t>WHY</a:t>
             </a:r>
@@ -20441,8 +20441,8 @@
                 <a:solidFill>
                   <a:srgbClr val="1F3A5F"/>
                 </a:solidFill>
-                <a:latin typeface="WenQuanYi Zen Hei"/>
-                <a:ea typeface="WenQuanYi Zen Hei"/>
+                <a:latin typeface="PingFang TC"/>
+                <a:ea typeface="PingFang TC"/>
               </a:rPr>
               <a:t>為什麼一定要做實驗</a:t>
             </a:r>
@@ -20528,8 +20528,8 @@
                 <a:solidFill>
                   <a:srgbClr val="5A6370"/>
                 </a:solidFill>
-                <a:latin typeface="WenQuanYi Zen Hei"/>
-                <a:ea typeface="WenQuanYi Zen Hei"/>
+                <a:latin typeface="PingFang TC"/>
+                <a:ea typeface="PingFang TC"/>
               </a:rPr>
               <a:t>03</a:t>
             </a:r>
@@ -20571,8 +20571,8 @@
                 <a:solidFill>
                   <a:srgbClr val="262B33"/>
                 </a:solidFill>
-                <a:latin typeface="WenQuanYi Zen Hei"/>
-                <a:ea typeface="WenQuanYi Zen Hei"/>
+                <a:latin typeface="PingFang TC"/>
+                <a:ea typeface="PingFang TC"/>
               </a:rPr>
               <a:t>●  模型現況：相對可信、絕對待測。</a:t>
             </a:r>
@@ -20591,8 +20591,8 @@
                 <a:solidFill>
                   <a:srgbClr val="262B33"/>
                 </a:solidFill>
-                <a:latin typeface="WenQuanYi Zen Hei"/>
-                <a:ea typeface="WenQuanYi Zen Hei"/>
+                <a:latin typeface="PingFang TC"/>
+                <a:ea typeface="PingFang TC"/>
               </a:rPr>
               <a:t>–  真實 Tc baseline R²=0.78（已用 NEMAD 真實資料）。</a:t>
             </a:r>
@@ -20611,8 +20611,8 @@
                 <a:solidFill>
                   <a:srgbClr val="262B33"/>
                 </a:solidFill>
-                <a:latin typeface="WenQuanYi Zen Hei"/>
-                <a:ea typeface="WenQuanYi Zen Hei"/>
+                <a:latin typeface="PingFang TC"/>
+                <a:ea typeface="PingFang TC"/>
               </a:rPr>
               <a:t>–  Br 溫度修正後 bias 僅 −0.12T（多為 0K-vs-室溫差，非系統性低估）。</a:t>
             </a:r>
@@ -20631,8 +20631,8 @@
                 <a:solidFill>
                   <a:srgbClr val="262B33"/>
                 </a:solidFill>
-                <a:latin typeface="WenQuanYi Zen Hei"/>
-                <a:ea typeface="WenQuanYi Zen Hei"/>
+                <a:latin typeface="PingFang TC"/>
+                <a:ea typeface="PingFang TC"/>
               </a:rPr>
               <a:t>–  發電側功率密度是理想化上界（比真實原型高 ~10×）。</a:t>
             </a:r>
@@ -20651,8 +20651,8 @@
                 <a:solidFill>
                   <a:srgbClr val="262B33"/>
                 </a:solidFill>
-                <a:latin typeface="WenQuanYi Zen Hei"/>
-                <a:ea typeface="WenQuanYi Zen Hei"/>
+                <a:latin typeface="PingFang TC"/>
+                <a:ea typeface="PingFang TC"/>
               </a:rPr>
               <a:t>–  複合 connectivity 影響增益 ~43%，但定性結論穩健。</a:t>
             </a:r>
@@ -20671,8 +20671,8 @@
                 <a:solidFill>
                   <a:srgbClr val="E76F51"/>
                 </a:solidFill>
-                <a:latin typeface="WenQuanYi Zen Hei"/>
-                <a:ea typeface="WenQuanYi Zen Hei"/>
+                <a:latin typeface="PingFang TC"/>
+                <a:ea typeface="PingFang TC"/>
               </a:rPr>
               <a:t>●  這些『絕對值待收斂』的缺口，只有真實樣品的 M-H/DSC/SEM 能補。</a:t>
             </a:r>
@@ -20691,8 +20691,8 @@
                 <a:solidFill>
                   <a:srgbClr val="1F3A5F"/>
                 </a:solidFill>
-                <a:latin typeface="WenQuanYi Zen Hei"/>
-                <a:ea typeface="WenQuanYi Zen Hei"/>
+                <a:latin typeface="PingFang TC"/>
+                <a:ea typeface="PingFang TC"/>
               </a:rPr>
               <a:t>●  目標：用最小規模、可控成本，把絕對值校準，讓設計能真正落地。</a:t>
             </a:r>
@@ -20796,8 +20796,8 @@
                 <a:solidFill>
                   <a:srgbClr val="2A9D8F"/>
                 </a:solidFill>
-                <a:latin typeface="WenQuanYi Zen Hei"/>
-                <a:ea typeface="WenQuanYi Zen Hei"/>
+                <a:latin typeface="PingFang TC"/>
+                <a:ea typeface="PingFang TC"/>
               </a:rPr>
               <a:t>PRINCIPLE</a:t>
             </a:r>
@@ -20839,8 +20839,8 @@
                 <a:solidFill>
                   <a:srgbClr val="1F3A5F"/>
                 </a:solidFill>
-                <a:latin typeface="WenQuanYi Zen Hei"/>
-                <a:ea typeface="WenQuanYi Zen Hei"/>
+                <a:latin typeface="PingFang TC"/>
+                <a:ea typeface="PingFang TC"/>
               </a:rPr>
               <a:t>核心理念：先導 + 決策門 + 擴張</a:t>
             </a:r>
@@ -20926,8 +20926,8 @@
                 <a:solidFill>
                   <a:srgbClr val="5A6370"/>
                 </a:solidFill>
-                <a:latin typeface="WenQuanYi Zen Hei"/>
-                <a:ea typeface="WenQuanYi Zen Hei"/>
+                <a:latin typeface="PingFang TC"/>
+                <a:ea typeface="PingFang TC"/>
               </a:rPr>
               <a:t>04</a:t>
             </a:r>
@@ -20993,8 +20993,8 @@
                 <a:solidFill>
                   <a:srgbClr val="262B33"/>
                 </a:solidFill>
-                <a:latin typeface="WenQuanYi Zen Hei"/>
-                <a:ea typeface="WenQuanYi Zen Hei"/>
+                <a:latin typeface="PingFang TC"/>
+                <a:ea typeface="PingFang TC"/>
               </a:rPr>
               <a:t>●  每階段先小規模驗證『流程＋模型量級』，過了決策門才放大投入。</a:t>
             </a:r>
@@ -21013,8 +21013,8 @@
                 <a:solidFill>
                   <a:srgbClr val="E76F51"/>
                 </a:solidFill>
-                <a:latin typeface="WenQuanYi Zen Hei"/>
-                <a:ea typeface="WenQuanYi Zen Hei"/>
+                <a:latin typeface="PingFang TC"/>
+                <a:ea typeface="PingFang TC"/>
               </a:rPr>
               <a:t>●  任一門未過 → 回上一階段修模型/製程，不貿然擴張——這就是避免重蹈覆轍。</a:t>
             </a:r>
@@ -21118,8 +21118,8 @@
                 <a:solidFill>
                   <a:srgbClr val="2A9D8F"/>
                 </a:solidFill>
-                <a:latin typeface="WenQuanYi Zen Hei"/>
-                <a:ea typeface="WenQuanYi Zen Hei"/>
+                <a:latin typeface="PingFang TC"/>
+                <a:ea typeface="PingFang TC"/>
               </a:rPr>
               <a:t>OBJECTIVES</a:t>
             </a:r>
@@ -21161,8 +21161,8 @@
                 <a:solidFill>
                   <a:srgbClr val="1F3A5F"/>
                 </a:solidFill>
-                <a:latin typeface="WenQuanYi Zen Hei"/>
-                <a:ea typeface="WenQuanYi Zen Hei"/>
+                <a:latin typeface="PingFang TC"/>
+                <a:ea typeface="PingFang TC"/>
               </a:rPr>
               <a:t>總體目標（SMART）</a:t>
             </a:r>
@@ -21248,8 +21248,8 @@
                 <a:solidFill>
                   <a:srgbClr val="5A6370"/>
                 </a:solidFill>
-                <a:latin typeface="WenQuanYi Zen Hei"/>
-                <a:ea typeface="WenQuanYi Zen Hei"/>
+                <a:latin typeface="PingFang TC"/>
+                <a:ea typeface="PingFang TC"/>
               </a:rPr>
               <a:t>05</a:t>
             </a:r>
@@ -21335,8 +21335,8 @@
                 <a:solidFill>
                   <a:srgbClr val="FFFFFF"/>
                 </a:solidFill>
-                <a:latin typeface="WenQuanYi Zen Hei"/>
-                <a:ea typeface="WenQuanYi Zen Hei"/>
+                <a:latin typeface="PingFang TC"/>
+                <a:ea typeface="PingFang TC"/>
               </a:rPr>
               <a:t>目標</a:t>
             </a:r>
@@ -21422,8 +21422,8 @@
                 <a:solidFill>
                   <a:srgbClr val="FFFFFF"/>
                 </a:solidFill>
-                <a:latin typeface="WenQuanYi Zen Hei"/>
-                <a:ea typeface="WenQuanYi Zen Hei"/>
+                <a:latin typeface="PingFang TC"/>
+                <a:ea typeface="PingFang TC"/>
               </a:rPr>
               <a:t>內容</a:t>
             </a:r>
@@ -21509,8 +21509,8 @@
                 <a:solidFill>
                   <a:srgbClr val="FFFFFF"/>
                 </a:solidFill>
-                <a:latin typeface="WenQuanYi Zen Hei"/>
-                <a:ea typeface="WenQuanYi Zen Hei"/>
+                <a:latin typeface="PingFang TC"/>
+                <a:ea typeface="PingFang TC"/>
               </a:rPr>
               <a:t>量化判準</a:t>
             </a:r>
@@ -21596,8 +21596,8 @@
                 <a:solidFill>
                   <a:srgbClr val="262B33"/>
                 </a:solidFill>
-                <a:latin typeface="WenQuanYi Zen Hei"/>
-                <a:ea typeface="WenQuanYi Zen Hei"/>
+                <a:latin typeface="PingFang TC"/>
+                <a:ea typeface="PingFang TC"/>
               </a:rPr>
               <a:t>G-A 流程可信</a:t>
             </a:r>
@@ -21683,8 +21683,8 @@
                 <a:solidFill>
                   <a:srgbClr val="262B33"/>
                 </a:solidFill>
-                <a:latin typeface="WenQuanYi Zen Hei"/>
-                <a:ea typeface="WenQuanYi Zen Hei"/>
+                <a:latin typeface="PingFang TC"/>
+                <a:ea typeface="PingFang TC"/>
               </a:rPr>
               <a:t>打通製樣→量測→回填全鏈</a:t>
             </a:r>
@@ -21770,8 +21770,8 @@
                 <a:solidFill>
                   <a:srgbClr val="262B33"/>
                 </a:solidFill>
-                <a:latin typeface="WenQuanYi Zen Hei"/>
-                <a:ea typeface="WenQuanYi Zen Hei"/>
+                <a:latin typeface="PingFang TC"/>
+                <a:ea typeface="PingFang TC"/>
               </a:rPr>
               <a:t>Gd ΔM/ΔS 與文獻 ±20% 內</a:t>
             </a:r>
@@ -21857,8 +21857,8 @@
                 <a:solidFill>
                   <a:srgbClr val="262B33"/>
                 </a:solidFill>
-                <a:latin typeface="WenQuanYi Zen Hei"/>
-                <a:ea typeface="WenQuanYi Zen Hei"/>
+                <a:latin typeface="PingFang TC"/>
+                <a:ea typeface="PingFang TC"/>
               </a:rPr>
               <a:t>G-B 模型校準</a:t>
             </a:r>
@@ -21944,8 +21944,8 @@
                 <a:solidFill>
                   <a:srgbClr val="262B33"/>
                 </a:solidFill>
-                <a:latin typeface="WenQuanYi Zen Hei"/>
-                <a:ea typeface="WenQuanYi Zen Hei"/>
+                <a:latin typeface="PingFang TC"/>
+                <a:ea typeface="PingFang TC"/>
               </a:rPr>
               <a:t>用實測收斂 ΔM/w/connectivity</a:t>
             </a:r>
@@ -22031,8 +22031,8 @@
                 <a:solidFill>
                   <a:srgbClr val="262B33"/>
                 </a:solidFill>
-                <a:latin typeface="WenQuanYi Zen Hei"/>
-                <a:ea typeface="WenQuanYi Zen Hei"/>
+                <a:latin typeface="PingFang TC"/>
+                <a:ea typeface="PingFang TC"/>
               </a:rPr>
               <a:t>關鍵參數誤差 &lt; 25%</a:t>
             </a:r>
@@ -22118,8 +22118,8 @@
                 <a:solidFill>
                   <a:srgbClr val="262B33"/>
                 </a:solidFill>
-                <a:latin typeface="WenQuanYi Zen Hei"/>
-                <a:ea typeface="WenQuanYi Zen Hei"/>
+                <a:latin typeface="PingFang TC"/>
+                <a:ea typeface="PingFang TC"/>
               </a:rPr>
               <a:t>G-C 端到端</a:t>
             </a:r>
@@ -22205,8 +22205,8 @@
                 <a:solidFill>
                   <a:srgbClr val="262B33"/>
                 </a:solidFill>
-                <a:latin typeface="WenQuanYi Zen Hei"/>
-                <a:ea typeface="WenQuanYi Zen Hei"/>
+                <a:latin typeface="PingFang TC"/>
+                <a:ea typeface="PingFang TC"/>
               </a:rPr>
               <a:t>GA 候選的預測 vs 實測</a:t>
             </a:r>
@@ -22292,8 +22292,8 @@
                 <a:solidFill>
                   <a:srgbClr val="262B33"/>
                 </a:solidFill>
-                <a:latin typeface="WenQuanYi Zen Hei"/>
-                <a:ea typeface="WenQuanYi Zen Hei"/>
+                <a:latin typeface="PingFang TC"/>
+                <a:ea typeface="PingFang TC"/>
               </a:rPr>
               <a:t>Tc 誤差 &lt; 50°C、排序正確</a:t>
             </a:r>
@@ -22379,8 +22379,8 @@
                 <a:solidFill>
                   <a:srgbClr val="262B33"/>
                 </a:solidFill>
-                <a:latin typeface="WenQuanYi Zen Hei"/>
-                <a:ea typeface="WenQuanYi Zen Hei"/>
+                <a:latin typeface="PingFang TC"/>
+                <a:ea typeface="PingFang TC"/>
               </a:rPr>
               <a:t>G-D 絕對校準</a:t>
             </a:r>
@@ -22466,8 +22466,8 @@
                 <a:solidFill>
                   <a:srgbClr val="262B33"/>
                 </a:solidFill>
-                <a:latin typeface="WenQuanYi Zen Hei"/>
-                <a:ea typeface="WenQuanYi Zen Hei"/>
+                <a:latin typeface="PingFang TC"/>
+                <a:ea typeface="PingFang TC"/>
               </a:rPr>
               <a:t>整機原型錨定發電側</a:t>
             </a:r>
@@ -22553,8 +22553,8 @@
                 <a:solidFill>
                   <a:srgbClr val="262B33"/>
                 </a:solidFill>
-                <a:latin typeface="WenQuanYi Zen Hei"/>
-                <a:ea typeface="WenQuanYi Zen Hei"/>
+                <a:latin typeface="PingFang TC"/>
+                <a:ea typeface="PingFang TC"/>
               </a:rPr>
               <a:t>P/V、η 量級對齊文獻原型</a:t>
             </a:r>
@@ -22596,8 +22596,8 @@
                 <a:solidFill>
                   <a:srgbClr val="5A6370"/>
                 </a:solidFill>
-                <a:latin typeface="WenQuanYi Zen Hei"/>
-                <a:ea typeface="WenQuanYi Zen Hei"/>
+                <a:latin typeface="PingFang TC"/>
+                <a:ea typeface="PingFang TC"/>
               </a:rPr>
               <a:t>每個目標都對應一個可量測的『過/不過』判準，避免主觀。</a:t>
             </a:r>
@@ -22701,8 +22701,8 @@
                 <a:solidFill>
                   <a:srgbClr val="2A9D8F"/>
                 </a:solidFill>
-                <a:latin typeface="WenQuanYi Zen Hei"/>
-                <a:ea typeface="WenQuanYi Zen Hei"/>
+                <a:latin typeface="PingFang TC"/>
+                <a:ea typeface="PingFang TC"/>
               </a:rPr>
               <a:t>KPI</a:t>
             </a:r>
@@ -22744,8 +22744,8 @@
                 <a:solidFill>
                   <a:srgbClr val="1F3A5F"/>
                 </a:solidFill>
-                <a:latin typeface="WenQuanYi Zen Hei"/>
-                <a:ea typeface="WenQuanYi Zen Hei"/>
+                <a:latin typeface="PingFang TC"/>
+                <a:ea typeface="PingFang TC"/>
               </a:rPr>
               <a:t>成功判準與 KPI</a:t>
             </a:r>
@@ -22831,8 +22831,8 @@
                 <a:solidFill>
                   <a:srgbClr val="5A6370"/>
                 </a:solidFill>
-                <a:latin typeface="WenQuanYi Zen Hei"/>
-                <a:ea typeface="WenQuanYi Zen Hei"/>
+                <a:latin typeface="PingFang TC"/>
+                <a:ea typeface="PingFang TC"/>
               </a:rPr>
               <a:t>06</a:t>
             </a:r>
@@ -22874,8 +22874,8 @@
                 <a:solidFill>
                   <a:srgbClr val="262B33"/>
                 </a:solidFill>
-                <a:latin typeface="WenQuanYi Zen Hei"/>
-                <a:ea typeface="WenQuanYi Zen Hei"/>
+                <a:latin typeface="PingFang TC"/>
+                <a:ea typeface="PingFang TC"/>
               </a:rPr>
               <a:t>●  先導 KPI（Phase 0，最關鍵）：純 Gd 的 ΔM(T)、ΔS_M、Tc 與文獻吻合（±20%）。</a:t>
             </a:r>
@@ -22894,8 +22894,8 @@
                 <a:solidFill>
                   <a:srgbClr val="262B33"/>
                 </a:solidFill>
-                <a:latin typeface="WenQuanYi Zen Hei"/>
-                <a:ea typeface="WenQuanYi Zen Hei"/>
+                <a:latin typeface="PingFang TC"/>
+                <a:ea typeface="PingFang TC"/>
               </a:rPr>
               <a:t>–  若連最單純的二階材料都對不上 → 是量測/流程問題，必須先解決再前進。</a:t>
             </a:r>
@@ -22914,8 +22914,8 @@
                 <a:solidFill>
                   <a:srgbClr val="262B33"/>
                 </a:solidFill>
-                <a:latin typeface="WenQuanYi Zen Hei"/>
-                <a:ea typeface="WenQuanYi Zen Hei"/>
+                <a:latin typeface="PingFang TC"/>
+                <a:ea typeface="PingFang TC"/>
               </a:rPr>
               <a:t>●  模型校準 KPI：回填後，reference_materials 與 design_tmg 的相對排序不變、絕對值收斂。</a:t>
             </a:r>
@@ -22934,8 +22934,8 @@
                 <a:solidFill>
                   <a:srgbClr val="262B33"/>
                 </a:solidFill>
-                <a:latin typeface="WenQuanYi Zen Hei"/>
-                <a:ea typeface="WenQuanYi Zen Hei"/>
+                <a:latin typeface="PingFang TC"/>
+                <a:ea typeface="PingFang TC"/>
               </a:rPr>
               <a:t>●  端到端 KPI：GA 推薦合金實測 Tc 誤差 &lt; 50°C；Top-N 排序與實測一致。</a:t>
             </a:r>
@@ -22954,8 +22954,8 @@
                 <a:solidFill>
                   <a:srgbClr val="262B33"/>
                 </a:solidFill>
-                <a:latin typeface="WenQuanYi Zen Hei"/>
-                <a:ea typeface="WenQuanYi Zen Hei"/>
+                <a:latin typeface="PingFang TC"/>
+                <a:ea typeface="PingFang TC"/>
               </a:rPr>
               <a:t>●  整機 KPI：原型 P/V、η 與文獻 TMG 原型同量級（收斂 D12 的 ~10× 落差）。</a:t>
             </a:r>
@@ -22974,8 +22974,8 @@
                 <a:solidFill>
                   <a:srgbClr val="2A9D8F"/>
                 </a:solidFill>
-                <a:latin typeface="WenQuanYi Zen Hei"/>
-                <a:ea typeface="WenQuanYi Zen Hei"/>
+                <a:latin typeface="PingFang TC"/>
+                <a:ea typeface="PingFang TC"/>
               </a:rPr>
               <a:t>●  全程 KPI：每階段資料入庫、可回填、可復現（對應 git 內腳本）。</a:t>
             </a:r>
@@ -23079,8 +23079,8 @@
                 <a:solidFill>
                   <a:srgbClr val="2A9D8F"/>
                 </a:solidFill>
-                <a:latin typeface="WenQuanYi Zen Hei"/>
-                <a:ea typeface="WenQuanYi Zen Hei"/>
+                <a:latin typeface="PingFang TC"/>
+                <a:ea typeface="PingFang TC"/>
               </a:rPr>
               <a:t>WHAT TO VALIDATE</a:t>
             </a:r>
@@ -23122,8 +23122,8 @@
                 <a:solidFill>
                   <a:srgbClr val="1F3A5F"/>
                 </a:solidFill>
-                <a:latin typeface="WenQuanYi Zen Hei"/>
-                <a:ea typeface="WenQuanYi Zen Hei"/>
+                <a:latin typeface="PingFang TC"/>
+                <a:ea typeface="PingFang TC"/>
               </a:rPr>
               <a:t>要驗證什麼（模型 → 真實）</a:t>
             </a:r>
@@ -23209,8 +23209,8 @@
                 <a:solidFill>
                   <a:srgbClr val="5A6370"/>
                 </a:solidFill>
-                <a:latin typeface="WenQuanYi Zen Hei"/>
-                <a:ea typeface="WenQuanYi Zen Hei"/>
+                <a:latin typeface="PingFang TC"/>
+                <a:ea typeface="PingFang TC"/>
               </a:rPr>
               <a:t>07</a:t>
             </a:r>
@@ -23296,8 +23296,8 @@
                 <a:solidFill>
                   <a:srgbClr val="FFFFFF"/>
                 </a:solidFill>
-                <a:latin typeface="WenQuanYi Zen Hei"/>
-                <a:ea typeface="WenQuanYi Zen Hei"/>
+                <a:latin typeface="PingFang TC"/>
+                <a:ea typeface="PingFang TC"/>
               </a:rPr>
               <a:t>模型量</a:t>
             </a:r>
@@ -23383,8 +23383,8 @@
                 <a:solidFill>
                   <a:srgbClr val="FFFFFF"/>
                 </a:solidFill>
-                <a:latin typeface="WenQuanYi Zen Hei"/>
-                <a:ea typeface="WenQuanYi Zen Hei"/>
+                <a:latin typeface="PingFang TC"/>
+                <a:ea typeface="PingFang TC"/>
               </a:rPr>
               <a:t>現況（假設/估計）</a:t>
             </a:r>
@@ -23470,8 +23470,8 @@
                 <a:solidFill>
                   <a:srgbClr val="FFFFFF"/>
                 </a:solidFill>
-                <a:latin typeface="WenQuanYi Zen Hei"/>
-                <a:ea typeface="WenQuanYi Zen Hei"/>
+                <a:latin typeface="PingFang TC"/>
+                <a:ea typeface="PingFang TC"/>
               </a:rPr>
               <a:t>實測校準</a:t>
             </a:r>
@@ -23557,8 +23557,8 @@
                 <a:solidFill>
                   <a:srgbClr val="262B33"/>
                 </a:solidFill>
-                <a:latin typeface="WenQuanYi Zen Hei"/>
-                <a:ea typeface="WenQuanYi Zen Hei"/>
+                <a:latin typeface="PingFang TC"/>
+                <a:ea typeface="PingFang TC"/>
               </a:rPr>
               <a:t>ΔM(工作溫度)</a:t>
             </a:r>
@@ -23644,8 +23644,8 @@
                 <a:solidFill>
                   <a:srgbClr val="262B33"/>
                 </a:solidFill>
-                <a:latin typeface="WenQuanYi Zen Hei"/>
-                <a:ea typeface="WenQuanYi Zen Hei"/>
+                <a:latin typeface="PingFang TC"/>
+                <a:ea typeface="PingFang TC"/>
               </a:rPr>
               <a:t>平均場 m(T/Tc) 推估</a:t>
             </a:r>
@@ -23731,8 +23731,8 @@
                 <a:solidFill>
                   <a:srgbClr val="262B33"/>
                 </a:solidFill>
-                <a:latin typeface="WenQuanYi Zen Hei"/>
-                <a:ea typeface="WenQuanYi Zen Hei"/>
+                <a:latin typeface="PingFang TC"/>
+                <a:ea typeface="PingFang TC"/>
               </a:rPr>
               <a:t>VSM M-H 迴線</a:t>
             </a:r>
@@ -23818,8 +23818,8 @@
                 <a:solidFill>
                   <a:srgbClr val="262B33"/>
                 </a:solidFill>
-                <a:latin typeface="WenQuanYi Zen Hei"/>
-                <a:ea typeface="WenQuanYi Zen Hei"/>
+                <a:latin typeface="PingFang TC"/>
+                <a:ea typeface="PingFang TC"/>
               </a:rPr>
               <a:t>一階銳度 w (D5)</a:t>
             </a:r>
@@ -23905,8 +23905,8 @@
                 <a:solidFill>
                   <a:srgbClr val="262B33"/>
                 </a:solidFill>
-                <a:latin typeface="WenQuanYi Zen Hei"/>
-                <a:ea typeface="WenQuanYi Zen Hei"/>
+                <a:latin typeface="PingFang TC"/>
+                <a:ea typeface="PingFang TC"/>
               </a:rPr>
               <a:t>假設值</a:t>
             </a:r>
@@ -23992,8 +23992,8 @@
                 <a:solidFill>
                   <a:srgbClr val="262B33"/>
                 </a:solidFill>
-                <a:latin typeface="WenQuanYi Zen Hei"/>
-                <a:ea typeface="WenQuanYi Zen Hei"/>
+                <a:latin typeface="PingFang TC"/>
+                <a:ea typeface="PingFang TC"/>
               </a:rPr>
               <a:t>M(T) 斜率擬合</a:t>
             </a:r>
@@ -24079,8 +24079,8 @@
                 <a:solidFill>
                   <a:srgbClr val="262B33"/>
                 </a:solidFill>
-                <a:latin typeface="WenQuanYi Zen Hei"/>
-                <a:ea typeface="WenQuanYi Zen Hei"/>
+                <a:latin typeface="PingFang TC"/>
+                <a:ea typeface="PingFang TC"/>
               </a:rPr>
               <a:t>複合 connectivity (D6)</a:t>
             </a:r>
@@ -24166,8 +24166,8 @@
                 <a:solidFill>
                   <a:srgbClr val="262B33"/>
                 </a:solidFill>
-                <a:latin typeface="WenQuanYi Zen Hei"/>
-                <a:ea typeface="WenQuanYi Zen Hei"/>
+                <a:latin typeface="PingFang TC"/>
+                <a:ea typeface="PingFang TC"/>
               </a:rPr>
               <a:t>假設 0.7（敏感 43%）</a:t>
             </a:r>
@@ -24253,8 +24253,8 @@
                 <a:solidFill>
                   <a:srgbClr val="262B33"/>
                 </a:solidFill>
-                <a:latin typeface="WenQuanYi Zen Hei"/>
-                <a:ea typeface="WenQuanYi Zen Hei"/>
+                <a:latin typeface="PingFang TC"/>
+                <a:ea typeface="PingFang TC"/>
               </a:rPr>
               <a:t>SEM 相連通度</a:t>
             </a:r>
@@ -24340,8 +24340,8 @@
                 <a:solidFill>
                   <a:srgbClr val="262B33"/>
                 </a:solidFill>
-                <a:latin typeface="WenQuanYi Zen Hei"/>
-                <a:ea typeface="WenQuanYi Zen Hei"/>
+                <a:latin typeface="PingFang TC"/>
+                <a:ea typeface="PingFang TC"/>
               </a:rPr>
               <a:t>κ / Cp / ΔS_M</a:t>
             </a:r>
@@ -24427,8 +24427,8 @@
                 <a:solidFill>
                   <a:srgbClr val="262B33"/>
                 </a:solidFill>
-                <a:latin typeface="WenQuanYi Zen Hei"/>
-                <a:ea typeface="WenQuanYi Zen Hei"/>
+                <a:latin typeface="PingFang TC"/>
+                <a:ea typeface="PingFang TC"/>
               </a:rPr>
               <a:t>純元素混合估計</a:t>
             </a:r>
@@ -24514,8 +24514,8 @@
                 <a:solidFill>
                   <a:srgbClr val="262B33"/>
                 </a:solidFill>
-                <a:latin typeface="WenQuanYi Zen Hei"/>
-                <a:ea typeface="WenQuanYi Zen Hei"/>
+                <a:latin typeface="PingFang TC"/>
+                <a:ea typeface="PingFang TC"/>
               </a:rPr>
               <a:t>雷射閃光 / DSC</a:t>
             </a:r>
@@ -24601,8 +24601,8 @@
                 <a:solidFill>
                   <a:srgbClr val="262B33"/>
                 </a:solidFill>
-                <a:latin typeface="WenQuanYi Zen Hei"/>
-                <a:ea typeface="WenQuanYi Zen Hei"/>
+                <a:latin typeface="PingFang TC"/>
+                <a:ea typeface="PingFang TC"/>
               </a:rPr>
               <a:t>氫化 Tc 上修 (D8)</a:t>
             </a:r>
@@ -24688,8 +24688,8 @@
                 <a:solidFill>
                   <a:srgbClr val="262B33"/>
                 </a:solidFill>
-                <a:latin typeface="WenQuanYi Zen Hei"/>
-                <a:ea typeface="WenQuanYi Zen Hei"/>
+                <a:latin typeface="PingFang TC"/>
+                <a:ea typeface="PingFang TC"/>
               </a:rPr>
               <a:t>heuristic 模型</a:t>
             </a:r>
@@ -24775,8 +24775,8 @@
                 <a:solidFill>
                   <a:srgbClr val="262B33"/>
                 </a:solidFill>
-                <a:latin typeface="WenQuanYi Zen Hei"/>
-                <a:ea typeface="WenQuanYi Zen Hei"/>
+                <a:latin typeface="PingFang TC"/>
+                <a:ea typeface="PingFang TC"/>
               </a:rPr>
               <a:t>氫化前後 VSM</a:t>
             </a:r>
@@ -24862,8 +24862,8 @@
                 <a:solidFill>
                   <a:srgbClr val="262B33"/>
                 </a:solidFill>
-                <a:latin typeface="WenQuanYi Zen Hei"/>
-                <a:ea typeface="WenQuanYi Zen Hei"/>
+                <a:latin typeface="PingFang TC"/>
+                <a:ea typeface="PingFang TC"/>
               </a:rPr>
               <a:t>整機 W/η/P (D12)</a:t>
             </a:r>
@@ -24949,8 +24949,8 @@
                 <a:solidFill>
                   <a:srgbClr val="262B33"/>
                 </a:solidFill>
-                <a:latin typeface="WenQuanYi Zen Hei"/>
-                <a:ea typeface="WenQuanYi Zen Hei"/>
+                <a:latin typeface="PingFang TC"/>
+                <a:ea typeface="PingFang TC"/>
               </a:rPr>
               <a:t>理想化上界</a:t>
             </a:r>
@@ -25036,8 +25036,8 @@
                 <a:solidFill>
                   <a:srgbClr val="262B33"/>
                 </a:solidFill>
-                <a:latin typeface="WenQuanYi Zen Hei"/>
-                <a:ea typeface="WenQuanYi Zen Hei"/>
+                <a:latin typeface="PingFang TC"/>
+                <a:ea typeface="PingFang TC"/>
               </a:rPr>
               <a:t>原型實測</a:t>
             </a:r>
@@ -25141,8 +25141,8 @@
                 <a:solidFill>
                   <a:srgbClr val="2A9D8F"/>
                 </a:solidFill>
-                <a:latin typeface="WenQuanYi Zen Hei"/>
-                <a:ea typeface="WenQuanYi Zen Hei"/>
+                <a:latin typeface="PingFang TC"/>
+                <a:ea typeface="PingFang TC"/>
               </a:rPr>
               <a:t>SAMPLES</a:t>
             </a:r>
@@ -25184,8 +25184,8 @@
                 <a:solidFill>
                   <a:srgbClr val="1F3A5F"/>
                 </a:solidFill>
-                <a:latin typeface="WenQuanYi Zen Hei"/>
-                <a:ea typeface="WenQuanYi Zen Hei"/>
+                <a:latin typeface="PingFang TC"/>
+                <a:ea typeface="PingFang TC"/>
               </a:rPr>
               <a:t>樣品計畫（最小可驗證集）</a:t>
             </a:r>
@@ -25271,8 +25271,8 @@
                 <a:solidFill>
                   <a:srgbClr val="5A6370"/>
                 </a:solidFill>
-                <a:latin typeface="WenQuanYi Zen Hei"/>
-                <a:ea typeface="WenQuanYi Zen Hei"/>
+                <a:latin typeface="PingFang TC"/>
+                <a:ea typeface="PingFang TC"/>
               </a:rPr>
               <a:t>08</a:t>
             </a:r>
@@ -25358,8 +25358,8 @@
                 <a:solidFill>
                   <a:srgbClr val="FFFFFF"/>
                 </a:solidFill>
-                <a:latin typeface="WenQuanYi Zen Hei"/>
-                <a:ea typeface="WenQuanYi Zen Hei"/>
+                <a:latin typeface="PingFang TC"/>
+                <a:ea typeface="PingFang TC"/>
               </a:rPr>
               <a:t>#</a:t>
             </a:r>
@@ -25445,8 +25445,8 @@
                 <a:solidFill>
                   <a:srgbClr val="FFFFFF"/>
                 </a:solidFill>
-                <a:latin typeface="WenQuanYi Zen Hei"/>
-                <a:ea typeface="WenQuanYi Zen Hei"/>
+                <a:latin typeface="PingFang TC"/>
+                <a:ea typeface="PingFang TC"/>
               </a:rPr>
               <a:t>材料</a:t>
             </a:r>
@@ -25532,8 +25532,8 @@
                 <a:solidFill>
                   <a:srgbClr val="FFFFFF"/>
                 </a:solidFill>
-                <a:latin typeface="WenQuanYi Zen Hei"/>
-                <a:ea typeface="WenQuanYi Zen Hei"/>
+                <a:latin typeface="PingFang TC"/>
+                <a:ea typeface="PingFang TC"/>
               </a:rPr>
               <a:t>目的</a:t>
             </a:r>
@@ -25619,8 +25619,8 @@
                 <a:solidFill>
                   <a:srgbClr val="FFFFFF"/>
                 </a:solidFill>
-                <a:latin typeface="WenQuanYi Zen Hei"/>
-                <a:ea typeface="WenQuanYi Zen Hei"/>
+                <a:latin typeface="PingFang TC"/>
+                <a:ea typeface="PingFang TC"/>
               </a:rPr>
               <a:t>Tc</a:t>
             </a:r>
@@ -25706,8 +25706,8 @@
                 <a:solidFill>
                   <a:srgbClr val="FFFFFF"/>
                 </a:solidFill>
-                <a:latin typeface="WenQuanYi Zen Hei"/>
-                <a:ea typeface="WenQuanYi Zen Hei"/>
+                <a:latin typeface="PingFang TC"/>
+                <a:ea typeface="PingFang TC"/>
               </a:rPr>
               <a:t>取得</a:t>
             </a:r>
@@ -25793,8 +25793,8 @@
                 <a:solidFill>
                   <a:srgbClr val="262B33"/>
                 </a:solidFill>
-                <a:latin typeface="WenQuanYi Zen Hei"/>
-                <a:ea typeface="WenQuanYi Zen Hei"/>
+                <a:latin typeface="PingFang TC"/>
+                <a:ea typeface="PingFang TC"/>
               </a:rPr>
               <a:t>M1</a:t>
             </a:r>
@@ -25880,8 +25880,8 @@
                 <a:solidFill>
                   <a:srgbClr val="262B33"/>
                 </a:solidFill>
-                <a:latin typeface="WenQuanYi Zen Hei"/>
-                <a:ea typeface="WenQuanYi Zen Hei"/>
+                <a:latin typeface="PingFang TC"/>
+                <a:ea typeface="PingFang TC"/>
               </a:rPr>
               <a:t>純 Gd</a:t>
             </a:r>
@@ -25967,8 +25967,8 @@
                 <a:solidFill>
                   <a:srgbClr val="262B33"/>
                 </a:solidFill>
-                <a:latin typeface="WenQuanYi Zen Hei"/>
-                <a:ea typeface="WenQuanYi Zen Hei"/>
+                <a:latin typeface="PingFang TC"/>
+                <a:ea typeface="PingFang TC"/>
               </a:rPr>
               <a:t>二階基準、流程打通</a:t>
             </a:r>
@@ -26054,8 +26054,8 @@
                 <a:solidFill>
                   <a:srgbClr val="262B33"/>
                 </a:solidFill>
-                <a:latin typeface="WenQuanYi Zen Hei"/>
-                <a:ea typeface="WenQuanYi Zen Hei"/>
+                <a:latin typeface="PingFang TC"/>
+                <a:ea typeface="PingFang TC"/>
               </a:rPr>
               <a:t>~293K</a:t>
             </a:r>
@@ -26141,8 +26141,8 @@
                 <a:solidFill>
                   <a:srgbClr val="262B33"/>
                 </a:solidFill>
-                <a:latin typeface="WenQuanYi Zen Hei"/>
-                <a:ea typeface="WenQuanYi Zen Hei"/>
+                <a:latin typeface="PingFang TC"/>
+                <a:ea typeface="PingFang TC"/>
               </a:rPr>
               <a:t>商購（高純）</a:t>
             </a:r>
@@ -26228,8 +26228,8 @@
                 <a:solidFill>
                   <a:srgbClr val="262B33"/>
                 </a:solidFill>
-                <a:latin typeface="WenQuanYi Zen Hei"/>
-                <a:ea typeface="WenQuanYi Zen Hei"/>
+                <a:latin typeface="PingFang TC"/>
+                <a:ea typeface="PingFang TC"/>
               </a:rPr>
               <a:t>M2</a:t>
             </a:r>
@@ -26315,8 +26315,8 @@
                 <a:solidFill>
                   <a:srgbClr val="262B33"/>
                 </a:solidFill>
-                <a:latin typeface="WenQuanYi Zen Hei"/>
-                <a:ea typeface="WenQuanYi Zen Hei"/>
+                <a:latin typeface="PingFang TC"/>
+                <a:ea typeface="PingFang TC"/>
               </a:rPr>
               <a:t>La(Fe,Si)13(H)</a:t>
             </a:r>
@@ -26402,8 +26402,8 @@
                 <a:solidFill>
                   <a:srgbClr val="262B33"/>
                 </a:solidFill>
-                <a:latin typeface="WenQuanYi Zen Hei"/>
-                <a:ea typeface="WenQuanYi Zen Hei"/>
+                <a:latin typeface="PingFang TC"/>
+                <a:ea typeface="PingFang TC"/>
               </a:rPr>
               <a:t>一階 + 氫化驗證(D8)</a:t>
             </a:r>
@@ -26489,8 +26489,8 @@
                 <a:solidFill>
                   <a:srgbClr val="262B33"/>
                 </a:solidFill>
-                <a:latin typeface="WenQuanYi Zen Hei"/>
-                <a:ea typeface="WenQuanYi Zen Hei"/>
+                <a:latin typeface="PingFang TC"/>
+                <a:ea typeface="PingFang TC"/>
               </a:rPr>
               <a:t>200→340K</a:t>
             </a:r>
@@ -26576,8 +26576,8 @@
                 <a:solidFill>
                   <a:srgbClr val="262B33"/>
                 </a:solidFill>
-                <a:latin typeface="WenQuanYi Zen Hei"/>
-                <a:ea typeface="WenQuanYi Zen Hei"/>
+                <a:latin typeface="PingFang TC"/>
+                <a:ea typeface="PingFang TC"/>
               </a:rPr>
               <a:t>委外/合作合成</a:t>
             </a:r>
@@ -26663,8 +26663,8 @@
                 <a:solidFill>
                   <a:srgbClr val="262B33"/>
                 </a:solidFill>
-                <a:latin typeface="WenQuanYi Zen Hei"/>
-                <a:ea typeface="WenQuanYi Zen Hei"/>
+                <a:latin typeface="PingFang TC"/>
+                <a:ea typeface="PingFang TC"/>
               </a:rPr>
               <a:t>M3</a:t>
             </a:r>
@@ -26750,8 +26750,8 @@
                 <a:solidFill>
                   <a:srgbClr val="262B33"/>
                 </a:solidFill>
-                <a:latin typeface="WenQuanYi Zen Hei"/>
-                <a:ea typeface="WenQuanYi Zen Hei"/>
+                <a:latin typeface="PingFang TC"/>
+                <a:ea typeface="PingFang TC"/>
               </a:rPr>
               <a:t>(Mn,Fe)2(P,Si)</a:t>
             </a:r>
@@ -26837,8 +26837,8 @@
                 <a:solidFill>
                   <a:srgbClr val="262B33"/>
                 </a:solidFill>
-                <a:latin typeface="WenQuanYi Zen Hei"/>
-                <a:ea typeface="WenQuanYi Zen Hei"/>
+                <a:latin typeface="PingFang TC"/>
+                <a:ea typeface="PingFang TC"/>
               </a:rPr>
               <a:t>無稀土一階、ΔS 最大</a:t>
             </a:r>
@@ -26924,8 +26924,8 @@
                 <a:solidFill>
                   <a:srgbClr val="262B33"/>
                 </a:solidFill>
-                <a:latin typeface="WenQuanYi Zen Hei"/>
-                <a:ea typeface="WenQuanYi Zen Hei"/>
+                <a:latin typeface="PingFang TC"/>
+                <a:ea typeface="PingFang TC"/>
               </a:rPr>
               <a:t>~280K</a:t>
             </a:r>
@@ -27011,8 +27011,8 @@
                 <a:solidFill>
                   <a:srgbClr val="262B33"/>
                 </a:solidFill>
-                <a:latin typeface="WenQuanYi Zen Hei"/>
-                <a:ea typeface="WenQuanYi Zen Hei"/>
+                <a:latin typeface="PingFang TC"/>
+                <a:ea typeface="PingFang TC"/>
               </a:rPr>
               <a:t>委外/合作合成</a:t>
             </a:r>
@@ -27098,8 +27098,8 @@
                 <a:solidFill>
                   <a:srgbClr val="262B33"/>
                 </a:solidFill>
-                <a:latin typeface="WenQuanYi Zen Hei"/>
-                <a:ea typeface="WenQuanYi Zen Hei"/>
+                <a:latin typeface="PingFang TC"/>
+                <a:ea typeface="PingFang TC"/>
               </a:rPr>
               <a:t>M4</a:t>
             </a:r>
@@ -27185,8 +27185,8 @@
                 <a:solidFill>
                   <a:srgbClr val="262B33"/>
                 </a:solidFill>
-                <a:latin typeface="WenQuanYi Zen Hei"/>
-                <a:ea typeface="WenQuanYi Zen Hei"/>
+                <a:latin typeface="PingFang TC"/>
+                <a:ea typeface="PingFang TC"/>
               </a:rPr>
               <a:t>GA 候選 Fe 系 1–2</a:t>
             </a:r>
@@ -27272,8 +27272,8 @@
                 <a:solidFill>
                   <a:srgbClr val="262B33"/>
                 </a:solidFill>
-                <a:latin typeface="WenQuanYi Zen Hei"/>
-                <a:ea typeface="WenQuanYi Zen Hei"/>
+                <a:latin typeface="PingFang TC"/>
+                <a:ea typeface="PingFang TC"/>
               </a:rPr>
               <a:t>端到端模型驗證</a:t>
             </a:r>
@@ -27359,8 +27359,8 @@
                 <a:solidFill>
                   <a:srgbClr val="262B33"/>
                 </a:solidFill>
-                <a:latin typeface="WenQuanYi Zen Hei"/>
-                <a:ea typeface="WenQuanYi Zen Hei"/>
+                <a:latin typeface="PingFang TC"/>
+                <a:ea typeface="PingFang TC"/>
               </a:rPr>
               <a:t>依搜尋</a:t>
             </a:r>
@@ -27446,8 +27446,8 @@
                 <a:solidFill>
                   <a:srgbClr val="262B33"/>
                 </a:solidFill>
-                <a:latin typeface="WenQuanYi Zen Hei"/>
-                <a:ea typeface="WenQuanYi Zen Hei"/>
+                <a:latin typeface="PingFang TC"/>
+                <a:ea typeface="PingFang TC"/>
               </a:rPr>
               <a:t>電弧熔煉自製</a:t>
             </a:r>
@@ -27489,8 +27489,8 @@
                 <a:solidFill>
                   <a:srgbClr val="5A6370"/>
                 </a:solidFill>
-                <a:latin typeface="WenQuanYi Zen Hei"/>
-                <a:ea typeface="WenQuanYi Zen Hei"/>
+                <a:latin typeface="PingFang TC"/>
+                <a:ea typeface="PingFang TC"/>
               </a:rPr>
               <a:t>選材邏輯：覆蓋二階/一階、有/無稀土、文獻基準/模型自選——以最少樣品覆蓋最多物理區。</a:t>
             </a:r>
@@ -27594,8 +27594,8 @@
                 <a:solidFill>
                   <a:srgbClr val="2A9D8F"/>
                 </a:solidFill>
-                <a:latin typeface="WenQuanYi Zen Hei"/>
-                <a:ea typeface="WenQuanYi Zen Hei"/>
+                <a:latin typeface="PingFang TC"/>
+                <a:ea typeface="PingFang TC"/>
               </a:rPr>
               <a:t>ACQUISITION</a:t>
             </a:r>
@@ -27637,8 +27637,8 @@
                 <a:solidFill>
                   <a:srgbClr val="1F3A5F"/>
                 </a:solidFill>
-                <a:latin typeface="WenQuanYi Zen Hei"/>
-                <a:ea typeface="WenQuanYi Zen Hei"/>
+                <a:latin typeface="PingFang TC"/>
+                <a:ea typeface="PingFang TC"/>
               </a:rPr>
               <a:t>樣品取得策略：買 vs 自製 vs 委外</a:t>
             </a:r>
@@ -27724,8 +27724,8 @@
                 <a:solidFill>
                   <a:srgbClr val="5A6370"/>
                 </a:solidFill>
-                <a:latin typeface="WenQuanYi Zen Hei"/>
-                <a:ea typeface="WenQuanYi Zen Hei"/>
+                <a:latin typeface="PingFang TC"/>
+                <a:ea typeface="PingFang TC"/>
               </a:rPr>
               <a:t>09</a:t>
             </a:r>
@@ -27811,8 +27811,8 @@
                 <a:solidFill>
                   <a:srgbClr val="FFFFFF"/>
                 </a:solidFill>
-                <a:latin typeface="WenQuanYi Zen Hei"/>
-                <a:ea typeface="WenQuanYi Zen Hei"/>
+                <a:latin typeface="PingFang TC"/>
+                <a:ea typeface="PingFang TC"/>
               </a:rPr>
               <a:t>方式</a:t>
             </a:r>
@@ -27898,8 +27898,8 @@
                 <a:solidFill>
                   <a:srgbClr val="FFFFFF"/>
                 </a:solidFill>
-                <a:latin typeface="WenQuanYi Zen Hei"/>
-                <a:ea typeface="WenQuanYi Zen Hei"/>
+                <a:latin typeface="PingFang TC"/>
+                <a:ea typeface="PingFang TC"/>
               </a:rPr>
               <a:t>適用</a:t>
             </a:r>
@@ -27985,8 +27985,8 @@
                 <a:solidFill>
                   <a:srgbClr val="FFFFFF"/>
                 </a:solidFill>
-                <a:latin typeface="WenQuanYi Zen Hei"/>
-                <a:ea typeface="WenQuanYi Zen Hei"/>
+                <a:latin typeface="PingFang TC"/>
+                <a:ea typeface="PingFang TC"/>
               </a:rPr>
               <a:t>優點</a:t>
             </a:r>
@@ -28072,8 +28072,8 @@
                 <a:solidFill>
                   <a:srgbClr val="FFFFFF"/>
                 </a:solidFill>
-                <a:latin typeface="WenQuanYi Zen Hei"/>
-                <a:ea typeface="WenQuanYi Zen Hei"/>
+                <a:latin typeface="PingFang TC"/>
+                <a:ea typeface="PingFang TC"/>
               </a:rPr>
               <a:t>風險/成本</a:t>
             </a:r>
@@ -28159,8 +28159,8 @@
                 <a:solidFill>
                   <a:srgbClr val="262B33"/>
                 </a:solidFill>
-                <a:latin typeface="WenQuanYi Zen Hei"/>
-                <a:ea typeface="WenQuanYi Zen Hei"/>
+                <a:latin typeface="PingFang TC"/>
+                <a:ea typeface="PingFang TC"/>
               </a:rPr>
               <a:t>商購</a:t>
             </a:r>
@@ -28246,8 +28246,8 @@
                 <a:solidFill>
                   <a:srgbClr val="262B33"/>
                 </a:solidFill>
-                <a:latin typeface="WenQuanYi Zen Hei"/>
-                <a:ea typeface="WenQuanYi Zen Hei"/>
+                <a:latin typeface="PingFang TC"/>
+                <a:ea typeface="PingFang TC"/>
               </a:rPr>
               <a:t>純 Gd、純元素</a:t>
             </a:r>
@@ -28333,8 +28333,8 @@
                 <a:solidFill>
                   <a:srgbClr val="262B33"/>
                 </a:solidFill>
-                <a:latin typeface="WenQuanYi Zen Hei"/>
-                <a:ea typeface="WenQuanYi Zen Hei"/>
+                <a:latin typeface="PingFang TC"/>
+                <a:ea typeface="PingFang TC"/>
               </a:rPr>
               <a:t>快、純度保證、低風險</a:t>
             </a:r>
@@ -28420,8 +28420,8 @@
                 <a:solidFill>
                   <a:srgbClr val="262B33"/>
                 </a:solidFill>
-                <a:latin typeface="WenQuanYi Zen Hei"/>
-                <a:ea typeface="WenQuanYi Zen Hei"/>
+                <a:latin typeface="PingFang TC"/>
+                <a:ea typeface="PingFang TC"/>
               </a:rPr>
               <a:t>成分受限</a:t>
             </a:r>
@@ -28507,8 +28507,8 @@
                 <a:solidFill>
                   <a:srgbClr val="262B33"/>
                 </a:solidFill>
-                <a:latin typeface="WenQuanYi Zen Hei"/>
-                <a:ea typeface="WenQuanYi Zen Hei"/>
+                <a:latin typeface="PingFang TC"/>
+                <a:ea typeface="PingFang TC"/>
               </a:rPr>
               <a:t>自製(電弧熔煉)</a:t>
             </a:r>
@@ -28594,8 +28594,8 @@
                 <a:solidFill>
                   <a:srgbClr val="262B33"/>
                 </a:solidFill>
-                <a:latin typeface="WenQuanYi Zen Hei"/>
-                <a:ea typeface="WenQuanYi Zen Hei"/>
+                <a:latin typeface="PingFang TC"/>
+                <a:ea typeface="PingFang TC"/>
               </a:rPr>
               <a:t>Fe 系 GA 候選</a:t>
             </a:r>
@@ -28681,8 +28681,8 @@
                 <a:solidFill>
                   <a:srgbClr val="262B33"/>
                 </a:solidFill>
-                <a:latin typeface="WenQuanYi Zen Hei"/>
-                <a:ea typeface="WenQuanYi Zen Hei"/>
+                <a:latin typeface="PingFang TC"/>
+                <a:ea typeface="PingFang TC"/>
               </a:rPr>
               <a:t>成分自由、快迭代</a:t>
             </a:r>
@@ -28768,8 +28768,8 @@
                 <a:solidFill>
                   <a:srgbClr val="262B33"/>
                 </a:solidFill>
-                <a:latin typeface="WenQuanYi Zen Hei"/>
-                <a:ea typeface="WenQuanYi Zen Hei"/>
+                <a:latin typeface="PingFang TC"/>
+                <a:ea typeface="PingFang TC"/>
               </a:rPr>
               <a:t>需熔煉+退火設備</a:t>
             </a:r>
@@ -28855,8 +28855,8 @@
                 <a:solidFill>
                   <a:srgbClr val="262B33"/>
                 </a:solidFill>
-                <a:latin typeface="WenQuanYi Zen Hei"/>
-                <a:ea typeface="WenQuanYi Zen Hei"/>
+                <a:latin typeface="PingFang TC"/>
+                <a:ea typeface="PingFang TC"/>
               </a:rPr>
               <a:t>委外/學界合作</a:t>
             </a:r>
@@ -28942,8 +28942,8 @@
                 <a:solidFill>
                   <a:srgbClr val="262B33"/>
                 </a:solidFill>
-                <a:latin typeface="WenQuanYi Zen Hei"/>
-                <a:ea typeface="WenQuanYi Zen Hei"/>
+                <a:latin typeface="PingFang TC"/>
+                <a:ea typeface="PingFang TC"/>
               </a:rPr>
               <a:t>La-Fe-Si、Mn-Fe-P</a:t>
             </a:r>
@@ -29029,8 +29029,8 @@
                 <a:solidFill>
                   <a:srgbClr val="262B33"/>
                 </a:solidFill>
-                <a:latin typeface="WenQuanYi Zen Hei"/>
-                <a:ea typeface="WenQuanYi Zen Hei"/>
+                <a:latin typeface="PingFang TC"/>
+                <a:ea typeface="PingFang TC"/>
               </a:rPr>
               <a:t>拿到難製一階相</a:t>
             </a:r>
@@ -29116,8 +29116,8 @@
                 <a:solidFill>
                   <a:srgbClr val="262B33"/>
                 </a:solidFill>
-                <a:latin typeface="WenQuanYi Zen Hei"/>
-                <a:ea typeface="WenQuanYi Zen Hei"/>
+                <a:latin typeface="PingFang TC"/>
+                <a:ea typeface="PingFang TC"/>
               </a:rPr>
               <a:t>週期長、需協調</a:t>
             </a:r>
@@ -29159,8 +29159,8 @@
                 <a:solidFill>
                   <a:srgbClr val="2A9D8F"/>
                 </a:solidFill>
-                <a:latin typeface="WenQuanYi Zen Hei"/>
-                <a:ea typeface="WenQuanYi Zen Hei"/>
+                <a:latin typeface="PingFang TC"/>
+                <a:ea typeface="PingFang TC"/>
               </a:rPr>
               <a:t>●  先導 Phase 0 只需『商購純 Gd』→ 零合成風險、最快啟動。</a:t>
             </a:r>
@@ -29179,8 +29179,8 @@
                 <a:solidFill>
                   <a:srgbClr val="E76F51"/>
                 </a:solidFill>
-                <a:latin typeface="WenQuanYi Zen Hei"/>
-                <a:ea typeface="WenQuanYi Zen Hei"/>
+                <a:latin typeface="PingFang TC"/>
+                <a:ea typeface="PingFang TC"/>
               </a:rPr>
               <a:t>●  一階材料優先找有 La-Fe-Si/Mn-Fe-P 經驗的實驗室合作，避免自行踩相形成的坑。</a:t>
             </a:r>
